--- a/A Brief Intro To GMAT - Phasing Maneuver Example.pptx
+++ b/A Brief Intro To GMAT - Phasing Maneuver Example.pptx
@@ -111,6 +111,11 @@
       </a:defRPr>
     </a:lvl9pPr>
   </p:defaultTextStyle>
+  <p:extLst>
+    <p:ext uri="{EFAFB233-063F-42B5-8137-9DF3F51BA10A}">
+      <p15:sldGuideLst xmlns:p15="http://schemas.microsoft.com/office/powerpoint/2012/main"/>
+    </p:ext>
+  </p:extLst>
 </p:presentation>
 </file>
 
@@ -196,7 +201,7 @@
           <a:p>
             <a:fld id="{1A91D20D-C4E2-4D60-A335-1BEC39CE9D3B}" type="datetimeFigureOut">
               <a:rPr lang="en-US" smtClean="0"/>
-              <a:t>5/12/2026</a:t>
+              <a:t>5/13/2026</a:t>
             </a:fld>
             <a:endParaRPr lang="en-US"/>
           </a:p>
@@ -694,7 +699,7 @@
           <a:p>
             <a:fld id="{B40FAA0D-FEED-4950-B1C4-DEC1AD7E6420}" type="datetimeFigureOut">
               <a:rPr lang="en-US" smtClean="0"/>
-              <a:t>5/12/2026</a:t>
+              <a:t>5/13/2026</a:t>
             </a:fld>
             <a:endParaRPr lang="en-US"/>
           </a:p>
@@ -892,7 +897,7 @@
           <a:p>
             <a:fld id="{B40FAA0D-FEED-4950-B1C4-DEC1AD7E6420}" type="datetimeFigureOut">
               <a:rPr lang="en-US" smtClean="0"/>
-              <a:t>5/12/2026</a:t>
+              <a:t>5/13/2026</a:t>
             </a:fld>
             <a:endParaRPr lang="en-US"/>
           </a:p>
@@ -1100,7 +1105,7 @@
           <a:p>
             <a:fld id="{B40FAA0D-FEED-4950-B1C4-DEC1AD7E6420}" type="datetimeFigureOut">
               <a:rPr lang="en-US" smtClean="0"/>
-              <a:t>5/12/2026</a:t>
+              <a:t>5/13/2026</a:t>
             </a:fld>
             <a:endParaRPr lang="en-US"/>
           </a:p>
@@ -1298,7 +1303,7 @@
           <a:p>
             <a:fld id="{B40FAA0D-FEED-4950-B1C4-DEC1AD7E6420}" type="datetimeFigureOut">
               <a:rPr lang="en-US" smtClean="0"/>
-              <a:t>5/12/2026</a:t>
+              <a:t>5/13/2026</a:t>
             </a:fld>
             <a:endParaRPr lang="en-US"/>
           </a:p>
@@ -1573,7 +1578,7 @@
           <a:p>
             <a:fld id="{B40FAA0D-FEED-4950-B1C4-DEC1AD7E6420}" type="datetimeFigureOut">
               <a:rPr lang="en-US" smtClean="0"/>
-              <a:t>5/12/2026</a:t>
+              <a:t>5/13/2026</a:t>
             </a:fld>
             <a:endParaRPr lang="en-US"/>
           </a:p>
@@ -1838,7 +1843,7 @@
           <a:p>
             <a:fld id="{B40FAA0D-FEED-4950-B1C4-DEC1AD7E6420}" type="datetimeFigureOut">
               <a:rPr lang="en-US" smtClean="0"/>
-              <a:t>5/12/2026</a:t>
+              <a:t>5/13/2026</a:t>
             </a:fld>
             <a:endParaRPr lang="en-US"/>
           </a:p>
@@ -2250,7 +2255,7 @@
           <a:p>
             <a:fld id="{B40FAA0D-FEED-4950-B1C4-DEC1AD7E6420}" type="datetimeFigureOut">
               <a:rPr lang="en-US" smtClean="0"/>
-              <a:t>5/12/2026</a:t>
+              <a:t>5/13/2026</a:t>
             </a:fld>
             <a:endParaRPr lang="en-US"/>
           </a:p>
@@ -2391,7 +2396,7 @@
           <a:p>
             <a:fld id="{B40FAA0D-FEED-4950-B1C4-DEC1AD7E6420}" type="datetimeFigureOut">
               <a:rPr lang="en-US" smtClean="0"/>
-              <a:t>5/12/2026</a:t>
+              <a:t>5/13/2026</a:t>
             </a:fld>
             <a:endParaRPr lang="en-US"/>
           </a:p>
@@ -2504,7 +2509,7 @@
           <a:p>
             <a:fld id="{B40FAA0D-FEED-4950-B1C4-DEC1AD7E6420}" type="datetimeFigureOut">
               <a:rPr lang="en-US" smtClean="0"/>
-              <a:t>5/12/2026</a:t>
+              <a:t>5/13/2026</a:t>
             </a:fld>
             <a:endParaRPr lang="en-US"/>
           </a:p>
@@ -2815,7 +2820,7 @@
           <a:p>
             <a:fld id="{B40FAA0D-FEED-4950-B1C4-DEC1AD7E6420}" type="datetimeFigureOut">
               <a:rPr lang="en-US" smtClean="0"/>
-              <a:t>5/12/2026</a:t>
+              <a:t>5/13/2026</a:t>
             </a:fld>
             <a:endParaRPr lang="en-US"/>
           </a:p>
@@ -3103,7 +3108,7 @@
           <a:p>
             <a:fld id="{B40FAA0D-FEED-4950-B1C4-DEC1AD7E6420}" type="datetimeFigureOut">
               <a:rPr lang="en-US" smtClean="0"/>
-              <a:t>5/12/2026</a:t>
+              <a:t>5/13/2026</a:t>
             </a:fld>
             <a:endParaRPr lang="en-US"/>
           </a:p>
@@ -3344,7 +3349,7 @@
           <a:p>
             <a:fld id="{B40FAA0D-FEED-4950-B1C4-DEC1AD7E6420}" type="datetimeFigureOut">
               <a:rPr lang="en-US" smtClean="0"/>
-              <a:t>5/12/2026</a:t>
+              <a:t>5/13/2026</a:t>
             </a:fld>
             <a:endParaRPr lang="en-US"/>
           </a:p>
@@ -4149,7 +4154,7 @@
           <a:p>
             <a:r>
               <a:rPr lang="en-US" sz="2000" dirty="0"/>
-              <a:t>Target and Chaser spacecraft are both in circular GEO orbits with 0.001 deg inclination</a:t>
+              <a:t>Target and Chaser spacecraft are both in circular GEO orbits with ~0 deg inclination</a:t>
             </a:r>
           </a:p>
           <a:p>
@@ -4167,7 +4172,7 @@
           <a:p>
             <a:r>
               <a:rPr lang="en-US" sz="2000" dirty="0"/>
-              <a:t>Target is prograde of chaser</a:t>
+              <a:t>Target is prograde of chaser initially</a:t>
             </a:r>
           </a:p>
         </p:txBody>
@@ -4298,22 +4303,14 @@
             <a:pPr lvl="1"/>
             <a:r>
               <a:rPr lang="en-US" dirty="0"/>
-              <a:t>Semimajor axis</a:t>
-            </a:r>
-            <a:r>
-              <a:rPr lang="en-US"/>
-              <a:t>: 42,164.15 </a:t>
-            </a:r>
+              <a:t>Semimajor axis: 42,164.15 km</a:t>
+            </a:r>
+          </a:p>
+          <a:p>
+            <a:pPr lvl="1"/>
             <a:r>
               <a:rPr lang="en-US" dirty="0"/>
-              <a:t>km</a:t>
-            </a:r>
-          </a:p>
-          <a:p>
-            <a:pPr lvl="1"/>
-            <a:r>
-              <a:rPr lang="en-US" dirty="0"/>
-              <a:t>Eccentricity: 0.00001</a:t>
+              <a:t>Eccentricity: 0.0</a:t>
             </a:r>
           </a:p>
           <a:p>
@@ -4342,6 +4339,12 @@
             <a:r>
               <a:rPr lang="en-US" dirty="0"/>
               <a:t>True anomaly: 0.0</a:t>
+            </a:r>
+          </a:p>
+          <a:p>
+            <a:r>
+              <a:rPr lang="en-US" dirty="0"/>
+              <a:t>Assuming we need 15 minutes to prepare for burn maneuvers</a:t>
             </a:r>
           </a:p>
           <a:p>
@@ -4524,8 +4527,8 @@
           </a:p>
         </p:txBody>
       </p:sp>
-      <mc:AlternateContent xmlns:mc="http://schemas.openxmlformats.org/markup-compatibility/2006">
-        <mc:Choice xmlns:a14="http://schemas.microsoft.com/office/drawing/2010/main" Requires="a14">
+      <mc:AlternateContent xmlns:mc="http://schemas.openxmlformats.org/markup-compatibility/2006" xmlns:a14="http://schemas.microsoft.com/office/drawing/2010/main">
+        <mc:Choice Requires="a14">
           <p:sp>
             <p:nvSpPr>
               <p:cNvPr id="7" name="TextBox 6">
@@ -4554,6 +4557,7 @@
               </a:bodyPr>
               <a:lstStyle/>
               <a:p>
+                <a:pPr/>
                 <a14:m>
                   <m:oMathPara xmlns:m="http://schemas.openxmlformats.org/officeDocument/2006/math">
                     <m:oMathParaPr>
@@ -4742,7 +4746,7 @@
             </p:txBody>
           </p:sp>
         </mc:Choice>
-        <mc:Fallback>
+        <mc:Fallback xmlns="">
           <p:sp>
             <p:nvSpPr>
               <p:cNvPr id="7" name="TextBox 6">
@@ -4981,8 +4985,8 @@
           </a:p>
         </p:txBody>
       </p:sp>
-      <mc:AlternateContent xmlns:mc="http://schemas.openxmlformats.org/markup-compatibility/2006">
-        <mc:Choice xmlns:a14="http://schemas.microsoft.com/office/drawing/2010/main" Requires="a14">
+      <mc:AlternateContent xmlns:mc="http://schemas.openxmlformats.org/markup-compatibility/2006" xmlns:a14="http://schemas.microsoft.com/office/drawing/2010/main">
+        <mc:Choice Requires="a14">
           <p:sp>
             <p:nvSpPr>
               <p:cNvPr id="17" name="TextBox 16">
@@ -5011,6 +5015,7 @@
               </a:bodyPr>
               <a:lstStyle/>
               <a:p>
+                <a:pPr/>
                 <a14:m>
                   <m:oMathPara xmlns:m="http://schemas.openxmlformats.org/officeDocument/2006/math">
                     <m:oMathParaPr>
@@ -5057,14 +5062,7 @@
                           <a:latin typeface="Cambria Math" panose="02040503050406030204" pitchFamily="18" charset="0"/>
                           <a:ea typeface="Cambria Math" panose="02040503050406030204" pitchFamily="18" charset="0"/>
                         </a:rPr>
-                        <m:t>=</m:t>
-                      </m:r>
-                      <m:r>
-                        <a:rPr lang="en-US" b="0" i="1" smtClean="0">
-                          <a:latin typeface="Cambria Math" panose="02040503050406030204" pitchFamily="18" charset="0"/>
-                          <a:ea typeface="Cambria Math" panose="02040503050406030204" pitchFamily="18" charset="0"/>
-                        </a:rPr>
-                        <m:t>2</m:t>
+                        <m:t>=2</m:t>
                       </m:r>
                       <m:func>
                         <m:funcPr>
@@ -5183,21 +5181,7 @@
                                       <a:latin typeface="Cambria Math" panose="02040503050406030204" pitchFamily="18" charset="0"/>
                                       <a:ea typeface="Cambria Math" panose="02040503050406030204" pitchFamily="18" charset="0"/>
                                     </a:rPr>
-                                    <m:t>42164</m:t>
-                                  </m:r>
-                                  <m:r>
-                                    <a:rPr lang="en-US" b="0" i="1" smtClean="0">
-                                      <a:latin typeface="Cambria Math" panose="02040503050406030204" pitchFamily="18" charset="0"/>
-                                      <a:ea typeface="Cambria Math" panose="02040503050406030204" pitchFamily="18" charset="0"/>
-                                    </a:rPr>
-                                    <m:t>.15</m:t>
-                                  </m:r>
-                                  <m:r>
-                                    <a:rPr lang="en-US" b="0" i="1" smtClean="0">
-                                      <a:latin typeface="Cambria Math" panose="02040503050406030204" pitchFamily="18" charset="0"/>
-                                      <a:ea typeface="Cambria Math" panose="02040503050406030204" pitchFamily="18" charset="0"/>
-                                    </a:rPr>
-                                    <m:t> </m:t>
+                                    <m:t>42164.15 </m:t>
                                   </m:r>
                                   <m:r>
                                     <a:rPr lang="en-US" b="0" i="1" smtClean="0">
@@ -5220,7 +5204,7 @@
             </p:txBody>
           </p:sp>
         </mc:Choice>
-        <mc:Fallback>
+        <mc:Fallback xmlns="">
           <p:sp>
             <p:nvSpPr>
               <p:cNvPr id="17" name="TextBox 16">

--- a/A Brief Intro To GMAT - Phasing Maneuver Example.pptx
+++ b/A Brief Intro To GMAT - Phasing Maneuver Example.pptx
@@ -5,14 +5,18 @@
     <p:sldMasterId id="2147483648" r:id="rId1"/>
   </p:sldMasterIdLst>
   <p:notesMasterIdLst>
-    <p:notesMasterId r:id="rId7"/>
+    <p:notesMasterId r:id="rId11"/>
   </p:notesMasterIdLst>
   <p:sldIdLst>
     <p:sldId id="256" r:id="rId2"/>
     <p:sldId id="257" r:id="rId3"/>
     <p:sldId id="258" r:id="rId4"/>
     <p:sldId id="259" r:id="rId5"/>
-    <p:sldId id="260" r:id="rId6"/>
+    <p:sldId id="261" r:id="rId6"/>
+    <p:sldId id="260" r:id="rId7"/>
+    <p:sldId id="262" r:id="rId8"/>
+    <p:sldId id="263" r:id="rId9"/>
+    <p:sldId id="264" r:id="rId10"/>
   </p:sldIdLst>
   <p:sldSz cx="12192000" cy="6858000"/>
   <p:notesSz cx="6858000" cy="9144000"/>
@@ -201,7 +205,7 @@
           <a:p>
             <a:fld id="{1A91D20D-C4E2-4D60-A335-1BEC39CE9D3B}" type="datetimeFigureOut">
               <a:rPr lang="en-US" smtClean="0"/>
-              <a:t>5/13/2026</a:t>
+              <a:t>5/14/2026</a:t>
             </a:fld>
             <a:endParaRPr lang="en-US"/>
           </a:p>
@@ -496,6 +500,13 @@
           </p:nvPr>
         </p:nvSpPr>
         <p:spPr/>
+        <p:txBody>
+          <a:bodyPr/>
+          <a:lstStyle/>
+          <a:p>
+            <a:endParaRPr lang="en-US"/>
+          </a:p>
+        </p:txBody>
       </p:sp>
       <p:sp>
         <p:nvSpPr>
@@ -533,7 +544,7 @@
           <a:p>
             <a:fld id="{F23EA1DC-C819-4131-BAF6-299AB9AFB4EF}" type="slidenum">
               <a:rPr lang="en-US" smtClean="0"/>
-              <a:t>5</a:t>
+              <a:t>6</a:t>
             </a:fld>
             <a:endParaRPr lang="en-US"/>
           </a:p>
@@ -699,7 +710,7 @@
           <a:p>
             <a:fld id="{B40FAA0D-FEED-4950-B1C4-DEC1AD7E6420}" type="datetimeFigureOut">
               <a:rPr lang="en-US" smtClean="0"/>
-              <a:t>5/13/2026</a:t>
+              <a:t>5/14/2026</a:t>
             </a:fld>
             <a:endParaRPr lang="en-US"/>
           </a:p>
@@ -897,7 +908,7 @@
           <a:p>
             <a:fld id="{B40FAA0D-FEED-4950-B1C4-DEC1AD7E6420}" type="datetimeFigureOut">
               <a:rPr lang="en-US" smtClean="0"/>
-              <a:t>5/13/2026</a:t>
+              <a:t>5/14/2026</a:t>
             </a:fld>
             <a:endParaRPr lang="en-US"/>
           </a:p>
@@ -1105,7 +1116,7 @@
           <a:p>
             <a:fld id="{B40FAA0D-FEED-4950-B1C4-DEC1AD7E6420}" type="datetimeFigureOut">
               <a:rPr lang="en-US" smtClean="0"/>
-              <a:t>5/13/2026</a:t>
+              <a:t>5/14/2026</a:t>
             </a:fld>
             <a:endParaRPr lang="en-US"/>
           </a:p>
@@ -1303,7 +1314,7 @@
           <a:p>
             <a:fld id="{B40FAA0D-FEED-4950-B1C4-DEC1AD7E6420}" type="datetimeFigureOut">
               <a:rPr lang="en-US" smtClean="0"/>
-              <a:t>5/13/2026</a:t>
+              <a:t>5/14/2026</a:t>
             </a:fld>
             <a:endParaRPr lang="en-US"/>
           </a:p>
@@ -1578,7 +1589,7 @@
           <a:p>
             <a:fld id="{B40FAA0D-FEED-4950-B1C4-DEC1AD7E6420}" type="datetimeFigureOut">
               <a:rPr lang="en-US" smtClean="0"/>
-              <a:t>5/13/2026</a:t>
+              <a:t>5/14/2026</a:t>
             </a:fld>
             <a:endParaRPr lang="en-US"/>
           </a:p>
@@ -1843,7 +1854,7 @@
           <a:p>
             <a:fld id="{B40FAA0D-FEED-4950-B1C4-DEC1AD7E6420}" type="datetimeFigureOut">
               <a:rPr lang="en-US" smtClean="0"/>
-              <a:t>5/13/2026</a:t>
+              <a:t>5/14/2026</a:t>
             </a:fld>
             <a:endParaRPr lang="en-US"/>
           </a:p>
@@ -2255,7 +2266,7 @@
           <a:p>
             <a:fld id="{B40FAA0D-FEED-4950-B1C4-DEC1AD7E6420}" type="datetimeFigureOut">
               <a:rPr lang="en-US" smtClean="0"/>
-              <a:t>5/13/2026</a:t>
+              <a:t>5/14/2026</a:t>
             </a:fld>
             <a:endParaRPr lang="en-US"/>
           </a:p>
@@ -2396,7 +2407,7 @@
           <a:p>
             <a:fld id="{B40FAA0D-FEED-4950-B1C4-DEC1AD7E6420}" type="datetimeFigureOut">
               <a:rPr lang="en-US" smtClean="0"/>
-              <a:t>5/13/2026</a:t>
+              <a:t>5/14/2026</a:t>
             </a:fld>
             <a:endParaRPr lang="en-US"/>
           </a:p>
@@ -2509,7 +2520,7 @@
           <a:p>
             <a:fld id="{B40FAA0D-FEED-4950-B1C4-DEC1AD7E6420}" type="datetimeFigureOut">
               <a:rPr lang="en-US" smtClean="0"/>
-              <a:t>5/13/2026</a:t>
+              <a:t>5/14/2026</a:t>
             </a:fld>
             <a:endParaRPr lang="en-US"/>
           </a:p>
@@ -2820,7 +2831,7 @@
           <a:p>
             <a:fld id="{B40FAA0D-FEED-4950-B1C4-DEC1AD7E6420}" type="datetimeFigureOut">
               <a:rPr lang="en-US" smtClean="0"/>
-              <a:t>5/13/2026</a:t>
+              <a:t>5/14/2026</a:t>
             </a:fld>
             <a:endParaRPr lang="en-US"/>
           </a:p>
@@ -3108,7 +3119,7 @@
           <a:p>
             <a:fld id="{B40FAA0D-FEED-4950-B1C4-DEC1AD7E6420}" type="datetimeFigureOut">
               <a:rPr lang="en-US" smtClean="0"/>
-              <a:t>5/13/2026</a:t>
+              <a:t>5/14/2026</a:t>
             </a:fld>
             <a:endParaRPr lang="en-US"/>
           </a:p>
@@ -3349,7 +3360,7 @@
           <a:p>
             <a:fld id="{B40FAA0D-FEED-4950-B1C4-DEC1AD7E6420}" type="datetimeFigureOut">
               <a:rPr lang="en-US" smtClean="0"/>
-              <a:t>5/13/2026</a:t>
+              <a:t>5/14/2026</a:t>
             </a:fld>
             <a:endParaRPr lang="en-US"/>
           </a:p>
@@ -3822,7 +3833,7 @@
           <a:bodyPr/>
           <a:lstStyle/>
           <a:p>
-            <a:endParaRPr lang="en-US"/>
+            <a:endParaRPr lang="en-US" dirty="0"/>
           </a:p>
         </p:txBody>
       </p:sp>
@@ -4120,13 +4131,13 @@
         <p:spPr/>
         <p:txBody>
           <a:bodyPr>
-            <a:normAutofit fontScale="92500" lnSpcReduction="10000"/>
+            <a:normAutofit lnSpcReduction="10000"/>
           </a:bodyPr>
           <a:lstStyle/>
           <a:p>
             <a:r>
               <a:rPr lang="en-US" sz="2000" dirty="0"/>
-              <a:t>Example problem is adapted from </a:t>
+              <a:t>Example problem is (loosely) adapted from </a:t>
             </a:r>
             <a:r>
               <a:rPr lang="en-US" sz="2000" dirty="0">
@@ -4143,12 +4154,6 @@
             <a:r>
               <a:rPr lang="en-US" sz="2000" dirty="0"/>
               <a:t>Initial time: March 21, 2028, 12:00:00 UTC</a:t>
-            </a:r>
-          </a:p>
-          <a:p>
-            <a:r>
-              <a:rPr lang="en-US" sz="2000" dirty="0"/>
-              <a:t>Final time: March 23, 2028, 12:00:00 UTC</a:t>
             </a:r>
           </a:p>
           <a:p>
@@ -4268,7 +4273,7 @@
           <a:p>
             <a:r>
               <a:rPr lang="en-US" dirty="0"/>
-              <a:t>More details re: setup</a:t>
+              <a:t>More Details re: Setup</a:t>
             </a:r>
           </a:p>
         </p:txBody>
@@ -4344,36 +4349,61 @@
           <a:p>
             <a:r>
               <a:rPr lang="en-US" dirty="0"/>
-              <a:t>Assuming we need 15 minutes to prepare for burn maneuvers</a:t>
-            </a:r>
-          </a:p>
-          <a:p>
+              <a:t>Chaser orbit: initially co-planar with Target’s orbit</a:t>
+            </a:r>
+          </a:p>
+        </p:txBody>
+      </p:sp>
+      <p:sp>
+        <p:nvSpPr>
+          <p:cNvPr id="4" name="Content Placeholder 3">
+            <a:extLst>
+              <a:ext uri="{FF2B5EF4-FFF2-40B4-BE49-F238E27FC236}">
+                <a16:creationId xmlns:a16="http://schemas.microsoft.com/office/drawing/2014/main" id="{D8675D94-7D70-6ED1-4B0B-54F396275F51}"/>
+              </a:ext>
+            </a:extLst>
+          </p:cNvPr>
+          <p:cNvSpPr>
+            <a:spLocks noGrp="1"/>
+          </p:cNvSpPr>
+          <p:nvPr>
+            <p:ph sz="half" idx="2"/>
+          </p:nvPr>
+        </p:nvSpPr>
+        <p:spPr/>
+        <p:txBody>
+          <a:bodyPr/>
+          <a:lstStyle/>
+          <a:p>
+            <a:r>
+              <a:rPr lang="en-US" dirty="0"/>
+              <a:t>Assumptions: </a:t>
+            </a:r>
+          </a:p>
+          <a:p>
+            <a:pPr lvl="1"/>
+            <a:r>
+              <a:rPr lang="en-US" dirty="0"/>
+              <a:t>Chaser needs 15 minutes to prepare for a burn maneuver</a:t>
+            </a:r>
+          </a:p>
+          <a:p>
+            <a:pPr lvl="1"/>
+            <a:r>
+              <a:rPr lang="en-US" dirty="0"/>
+              <a:t>Want to quickly close the distance, so Chaser will phase after one revolution to close to 10 km</a:t>
+            </a:r>
+          </a:p>
+          <a:p>
+            <a:pPr lvl="1"/>
+            <a:r>
+              <a:rPr lang="en-US" dirty="0"/>
+              <a:t>Assuming Target starts with R-vector through ECI X-axis with +Y axis velocity</a:t>
+            </a:r>
+          </a:p>
+          <a:p>
+            <a:pPr lvl="1"/>
             <a:endParaRPr lang="en-US" dirty="0"/>
-          </a:p>
-        </p:txBody>
-      </p:sp>
-      <p:sp>
-        <p:nvSpPr>
-          <p:cNvPr id="4" name="Content Placeholder 3">
-            <a:extLst>
-              <a:ext uri="{FF2B5EF4-FFF2-40B4-BE49-F238E27FC236}">
-                <a16:creationId xmlns:a16="http://schemas.microsoft.com/office/drawing/2014/main" id="{D8675D94-7D70-6ED1-4B0B-54F396275F51}"/>
-              </a:ext>
-            </a:extLst>
-          </p:cNvPr>
-          <p:cNvSpPr>
-            <a:spLocks noGrp="1"/>
-          </p:cNvSpPr>
-          <p:nvPr>
-            <p:ph sz="half" idx="2"/>
-          </p:nvPr>
-        </p:nvSpPr>
-        <p:spPr/>
-        <p:txBody>
-          <a:bodyPr/>
-          <a:lstStyle/>
-          <a:p>
-            <a:endParaRPr lang="en-US"/>
           </a:p>
         </p:txBody>
       </p:sp>
@@ -4412,6 +4442,336 @@
           <p:cNvPr id="2" name="Title 1">
             <a:extLst>
               <a:ext uri="{FF2B5EF4-FFF2-40B4-BE49-F238E27FC236}">
+                <a16:creationId xmlns:a16="http://schemas.microsoft.com/office/drawing/2014/main" id="{C785571A-DA33-63FF-4016-A7057C5CD73D}"/>
+              </a:ext>
+            </a:extLst>
+          </p:cNvPr>
+          <p:cNvSpPr>
+            <a:spLocks noGrp="1"/>
+          </p:cNvSpPr>
+          <p:nvPr>
+            <p:ph type="title"/>
+          </p:nvPr>
+        </p:nvSpPr>
+        <p:spPr/>
+        <p:txBody>
+          <a:bodyPr/>
+          <a:lstStyle/>
+          <a:p>
+            <a:r>
+              <a:rPr lang="en-US" dirty="0"/>
+              <a:t>Phasing Orbit</a:t>
+            </a:r>
+          </a:p>
+        </p:txBody>
+      </p:sp>
+      <p:sp>
+        <p:nvSpPr>
+          <p:cNvPr id="3" name="Content Placeholder 2">
+            <a:extLst>
+              <a:ext uri="{FF2B5EF4-FFF2-40B4-BE49-F238E27FC236}">
+                <a16:creationId xmlns:a16="http://schemas.microsoft.com/office/drawing/2014/main" id="{B81F27DB-EA14-F2FE-39C3-54E991FD5974}"/>
+              </a:ext>
+            </a:extLst>
+          </p:cNvPr>
+          <p:cNvSpPr>
+            <a:spLocks noGrp="1"/>
+          </p:cNvSpPr>
+          <p:nvPr>
+            <p:ph sz="half" idx="1"/>
+          </p:nvPr>
+        </p:nvSpPr>
+        <p:spPr/>
+        <p:txBody>
+          <a:bodyPr>
+            <a:normAutofit fontScale="77500" lnSpcReduction="20000"/>
+          </a:bodyPr>
+          <a:lstStyle/>
+          <a:p>
+            <a:r>
+              <a:rPr lang="en-US" dirty="0"/>
+              <a:t>We want to put the Chaser into a phasing orbit to </a:t>
+            </a:r>
+            <a:r>
+              <a:rPr lang="en-US" i="1" dirty="0"/>
+              <a:t>catch up</a:t>
+            </a:r>
+            <a:r>
+              <a:rPr lang="en-US" dirty="0"/>
+              <a:t> to the Target</a:t>
+            </a:r>
+          </a:p>
+          <a:p>
+            <a:r>
+              <a:rPr lang="en-US" dirty="0"/>
+              <a:t>Hence, our orbital period for our transfer orbit (Orbit 2 shown right) must be </a:t>
+            </a:r>
+            <a:r>
+              <a:rPr lang="en-US" i="1" dirty="0"/>
+              <a:t>shorter</a:t>
+            </a:r>
+            <a:r>
+              <a:rPr lang="en-US" dirty="0"/>
+              <a:t> than our final orbit</a:t>
+            </a:r>
+          </a:p>
+          <a:p>
+            <a:r>
+              <a:rPr lang="en-US" dirty="0"/>
+              <a:t>To get from Orbit 1 to Orbit 2, we first need to burn </a:t>
+            </a:r>
+            <a:r>
+              <a:rPr lang="en-US" i="1" dirty="0"/>
+              <a:t>retrograde </a:t>
+            </a:r>
+            <a:r>
+              <a:rPr lang="en-US" dirty="0"/>
+              <a:t>for Burn1</a:t>
+            </a:r>
+          </a:p>
+          <a:p>
+            <a:r>
+              <a:rPr lang="en-US" dirty="0"/>
+              <a:t>To circularize onto our final orbit, we will burn </a:t>
+            </a:r>
+            <a:r>
+              <a:rPr lang="en-US" i="1" dirty="0"/>
+              <a:t>prograde</a:t>
+            </a:r>
+            <a:r>
+              <a:rPr lang="en-US" dirty="0"/>
+              <a:t> at the intersection of Orbit 1 and Orbit 2</a:t>
+            </a:r>
+          </a:p>
+          <a:p>
+            <a:r>
+              <a:rPr lang="en-US" dirty="0"/>
+              <a:t>We will model these burns as ideal impulsive maneuvers (lower-fidelity but acceptable for initial mission analysis / trade studies)</a:t>
+            </a:r>
+          </a:p>
+        </p:txBody>
+      </p:sp>
+      <p:pic>
+        <p:nvPicPr>
+          <p:cNvPr id="8" name="Content Placeholder 7">
+            <a:extLst>
+              <a:ext uri="{FF2B5EF4-FFF2-40B4-BE49-F238E27FC236}">
+                <a16:creationId xmlns:a16="http://schemas.microsoft.com/office/drawing/2014/main" id="{5A2E3C26-3B86-C02A-CA20-37B395CDC1FA}"/>
+              </a:ext>
+            </a:extLst>
+          </p:cNvPr>
+          <p:cNvPicPr>
+            <a:picLocks noGrp="1" noChangeAspect="1"/>
+          </p:cNvPicPr>
+          <p:nvPr>
+            <p:ph sz="half" idx="2"/>
+          </p:nvPr>
+        </p:nvPicPr>
+        <p:blipFill>
+          <a:blip r:embed="rId2"/>
+          <a:stretch>
+            <a:fillRect/>
+          </a:stretch>
+        </p:blipFill>
+        <p:spPr bwMode="auto">
+          <a:xfrm>
+            <a:off x="6587331" y="1825625"/>
+            <a:ext cx="4351338" cy="4351338"/>
+          </a:xfrm>
+          <a:prstGeom prst="rect">
+            <a:avLst/>
+          </a:prstGeom>
+          <a:noFill/>
+          <a:extLst>
+            <a:ext uri="{909E8E84-426E-40DD-AFC4-6F175D3DCCD1}">
+              <a14:hiddenFill xmlns:a14="http://schemas.microsoft.com/office/drawing/2010/main">
+                <a:solidFill>
+                  <a:srgbClr val="FFFFFF"/>
+                </a:solidFill>
+              </a14:hiddenFill>
+            </a:ext>
+          </a:extLst>
+        </p:spPr>
+      </p:pic>
+      <p:sp>
+        <p:nvSpPr>
+          <p:cNvPr id="9" name="TextBox 8">
+            <a:extLst>
+              <a:ext uri="{FF2B5EF4-FFF2-40B4-BE49-F238E27FC236}">
+                <a16:creationId xmlns:a16="http://schemas.microsoft.com/office/drawing/2014/main" id="{55ED04C1-DC0E-0212-C9FE-F391EB8B33CF}"/>
+              </a:ext>
+            </a:extLst>
+          </p:cNvPr>
+          <p:cNvSpPr txBox="1"/>
+          <p:nvPr/>
+        </p:nvSpPr>
+        <p:spPr>
+          <a:xfrm>
+            <a:off x="6587332" y="6176963"/>
+            <a:ext cx="4351338" cy="430887"/>
+          </a:xfrm>
+          <a:prstGeom prst="rect">
+            <a:avLst/>
+          </a:prstGeom>
+          <a:noFill/>
+        </p:spPr>
+        <p:txBody>
+          <a:bodyPr wrap="square" rtlCol="0">
+            <a:spAutoFit/>
+          </a:bodyPr>
+          <a:lstStyle/>
+          <a:p>
+            <a:r>
+              <a:rPr lang="en-US" sz="1100" dirty="0"/>
+              <a:t>Image credit: https://orbital-mechanics.space/orbital-maneuvers/phasing-maneuvers.html</a:t>
+            </a:r>
+          </a:p>
+        </p:txBody>
+      </p:sp>
+      <p:sp>
+        <p:nvSpPr>
+          <p:cNvPr id="4" name="TextBox 3">
+            <a:extLst>
+              <a:ext uri="{FF2B5EF4-FFF2-40B4-BE49-F238E27FC236}">
+                <a16:creationId xmlns:a16="http://schemas.microsoft.com/office/drawing/2014/main" id="{66B096BA-E798-56AB-CB92-9A0EA31B2A80}"/>
+              </a:ext>
+            </a:extLst>
+          </p:cNvPr>
+          <p:cNvSpPr txBox="1"/>
+          <p:nvPr/>
+        </p:nvSpPr>
+        <p:spPr>
+          <a:xfrm>
+            <a:off x="10938669" y="4318103"/>
+            <a:ext cx="833163" cy="369332"/>
+          </a:xfrm>
+          <a:prstGeom prst="rect">
+            <a:avLst/>
+          </a:prstGeom>
+          <a:noFill/>
+        </p:spPr>
+        <p:txBody>
+          <a:bodyPr wrap="square" rtlCol="0">
+            <a:spAutoFit/>
+          </a:bodyPr>
+          <a:lstStyle/>
+          <a:p>
+            <a:r>
+              <a:rPr lang="en-US" dirty="0"/>
+              <a:t>Burn 1</a:t>
+            </a:r>
+          </a:p>
+        </p:txBody>
+      </p:sp>
+      <p:cxnSp>
+        <p:nvCxnSpPr>
+          <p:cNvPr id="6" name="Straight Arrow Connector 5">
+            <a:extLst>
+              <a:ext uri="{FF2B5EF4-FFF2-40B4-BE49-F238E27FC236}">
+                <a16:creationId xmlns:a16="http://schemas.microsoft.com/office/drawing/2014/main" id="{1A0215C6-2E9B-E057-5F5C-38B359F95FEC}"/>
+              </a:ext>
+            </a:extLst>
+          </p:cNvPr>
+          <p:cNvCxnSpPr/>
+          <p:nvPr/>
+        </p:nvCxnSpPr>
+        <p:spPr>
+          <a:xfrm flipH="1" flipV="1">
+            <a:off x="10788203" y="3165386"/>
+            <a:ext cx="38637" cy="768439"/>
+          </a:xfrm>
+          <a:prstGeom prst="straightConnector1">
+            <a:avLst/>
+          </a:prstGeom>
+          <a:ln>
+            <a:tailEnd type="triangle"/>
+          </a:ln>
+        </p:spPr>
+        <p:style>
+          <a:lnRef idx="2">
+            <a:schemeClr val="accent1"/>
+          </a:lnRef>
+          <a:fillRef idx="0">
+            <a:schemeClr val="accent1"/>
+          </a:fillRef>
+          <a:effectRef idx="1">
+            <a:schemeClr val="accent1"/>
+          </a:effectRef>
+          <a:fontRef idx="minor">
+            <a:schemeClr val="tx1"/>
+          </a:fontRef>
+        </p:style>
+      </p:cxnSp>
+      <p:sp>
+        <p:nvSpPr>
+          <p:cNvPr id="7" name="TextBox 6">
+            <a:extLst>
+              <a:ext uri="{FF2B5EF4-FFF2-40B4-BE49-F238E27FC236}">
+                <a16:creationId xmlns:a16="http://schemas.microsoft.com/office/drawing/2014/main" id="{AE8B6557-D827-720B-64D3-FC18F32BDF37}"/>
+              </a:ext>
+            </a:extLst>
+          </p:cNvPr>
+          <p:cNvSpPr txBox="1"/>
+          <p:nvPr/>
+        </p:nvSpPr>
+        <p:spPr>
+          <a:xfrm>
+            <a:off x="10869770" y="3447296"/>
+            <a:ext cx="833163" cy="369332"/>
+          </a:xfrm>
+          <a:prstGeom prst="rect">
+            <a:avLst/>
+          </a:prstGeom>
+          <a:noFill/>
+        </p:spPr>
+        <p:txBody>
+          <a:bodyPr wrap="square" rtlCol="0">
+            <a:spAutoFit/>
+          </a:bodyPr>
+          <a:lstStyle/>
+          <a:p>
+            <a:r>
+              <a:rPr lang="en-US" dirty="0"/>
+              <a:t>Burn 2</a:t>
+            </a:r>
+          </a:p>
+        </p:txBody>
+      </p:sp>
+    </p:spTree>
+    <p:extLst>
+      <p:ext uri="{BB962C8B-B14F-4D97-AF65-F5344CB8AC3E}">
+        <p14:creationId xmlns:p14="http://schemas.microsoft.com/office/powerpoint/2010/main" val="2655548154"/>
+      </p:ext>
+    </p:extLst>
+  </p:cSld>
+  <p:clrMapOvr>
+    <a:masterClrMapping/>
+  </p:clrMapOvr>
+</p:sld>
+</file>
+
+<file path=ppt/slides/slide6.xml><?xml version="1.0" encoding="utf-8"?>
+<p:sld xmlns:a="http://schemas.openxmlformats.org/drawingml/2006/main" xmlns:r="http://schemas.openxmlformats.org/officeDocument/2006/relationships" xmlns:p="http://schemas.openxmlformats.org/presentationml/2006/main">
+  <p:cSld>
+    <p:spTree>
+      <p:nvGrpSpPr>
+        <p:cNvPr id="1" name=""/>
+        <p:cNvGrpSpPr/>
+        <p:nvPr/>
+      </p:nvGrpSpPr>
+      <p:grpSpPr>
+        <a:xfrm>
+          <a:off x="0" y="0"/>
+          <a:ext cx="0" cy="0"/>
+          <a:chOff x="0" y="0"/>
+          <a:chExt cx="0" cy="0"/>
+        </a:xfrm>
+      </p:grpSpPr>
+      <p:sp>
+        <p:nvSpPr>
+          <p:cNvPr id="2" name="Title 1">
+            <a:extLst>
+              <a:ext uri="{FF2B5EF4-FFF2-40B4-BE49-F238E27FC236}">
                 <a16:creationId xmlns:a16="http://schemas.microsoft.com/office/drawing/2014/main" id="{442AB497-F378-5A18-2B51-0278BCF599D4}"/>
               </a:ext>
             </a:extLst>
@@ -4430,7 +4790,7 @@
           <a:p>
             <a:r>
               <a:rPr lang="en-US" dirty="0"/>
-              <a:t>Some trigonometry to help us</a:t>
+              <a:t>Some Trigonometry To Help Us</a:t>
             </a:r>
           </a:p>
         </p:txBody>
@@ -5766,6 +6126,1697 @@
     <p:extLst>
       <p:ext uri="{BB962C8B-B14F-4D97-AF65-F5344CB8AC3E}">
         <p14:creationId xmlns:p14="http://schemas.microsoft.com/office/powerpoint/2010/main" val="3478519804"/>
+      </p:ext>
+    </p:extLst>
+  </p:cSld>
+  <p:clrMapOvr>
+    <a:masterClrMapping/>
+  </p:clrMapOvr>
+</p:sld>
+</file>
+
+<file path=ppt/slides/slide7.xml><?xml version="1.0" encoding="utf-8"?>
+<p:sld xmlns:a="http://schemas.openxmlformats.org/drawingml/2006/main" xmlns:r="http://schemas.openxmlformats.org/officeDocument/2006/relationships" xmlns:p="http://schemas.openxmlformats.org/presentationml/2006/main">
+  <p:cSld>
+    <p:spTree>
+      <p:nvGrpSpPr>
+        <p:cNvPr id="1" name=""/>
+        <p:cNvGrpSpPr/>
+        <p:nvPr/>
+      </p:nvGrpSpPr>
+      <p:grpSpPr>
+        <a:xfrm>
+          <a:off x="0" y="0"/>
+          <a:ext cx="0" cy="0"/>
+          <a:chOff x="0" y="0"/>
+          <a:chExt cx="0" cy="0"/>
+        </a:xfrm>
+      </p:grpSpPr>
+      <p:sp>
+        <p:nvSpPr>
+          <p:cNvPr id="2" name="Title 1">
+            <a:extLst>
+              <a:ext uri="{FF2B5EF4-FFF2-40B4-BE49-F238E27FC236}">
+                <a16:creationId xmlns:a16="http://schemas.microsoft.com/office/drawing/2014/main" id="{CECE86DB-C885-B4C8-C600-C4DA865EDEA6}"/>
+              </a:ext>
+            </a:extLst>
+          </p:cNvPr>
+          <p:cNvSpPr>
+            <a:spLocks noGrp="1"/>
+          </p:cNvSpPr>
+          <p:nvPr>
+            <p:ph type="title"/>
+          </p:nvPr>
+        </p:nvSpPr>
+        <p:spPr/>
+        <p:txBody>
+          <a:bodyPr/>
+          <a:lstStyle/>
+          <a:p>
+            <a:r>
+              <a:rPr lang="en-US" dirty="0"/>
+              <a:t>More Math</a:t>
+            </a:r>
+          </a:p>
+        </p:txBody>
+      </p:sp>
+      <mc:AlternateContent xmlns:mc="http://schemas.openxmlformats.org/markup-compatibility/2006">
+        <mc:Choice xmlns:a14="http://schemas.microsoft.com/office/drawing/2010/main" Requires="a14">
+          <p:sp>
+            <p:nvSpPr>
+              <p:cNvPr id="3" name="Content Placeholder 2">
+                <a:extLst>
+                  <a:ext uri="{FF2B5EF4-FFF2-40B4-BE49-F238E27FC236}">
+                    <a16:creationId xmlns:a16="http://schemas.microsoft.com/office/drawing/2014/main" id="{D0AA13CB-84B8-9C20-6639-7F4F4F45A63D}"/>
+                  </a:ext>
+                </a:extLst>
+              </p:cNvPr>
+              <p:cNvSpPr>
+                <a:spLocks noGrp="1"/>
+              </p:cNvSpPr>
+              <p:nvPr>
+                <p:ph sz="half" idx="1"/>
+              </p:nvPr>
+            </p:nvSpPr>
+            <p:spPr/>
+            <p:txBody>
+              <a:bodyPr>
+                <a:normAutofit fontScale="92500"/>
+              </a:bodyPr>
+              <a:lstStyle/>
+              <a:p>
+                <a14:m>
+                  <m:oMath xmlns:m="http://schemas.openxmlformats.org/officeDocument/2006/math">
+                    <m:r>
+                      <a:rPr lang="en-US" sz="2400" b="0" i="1" smtClean="0">
+                        <a:latin typeface="Cambria Math" panose="02040503050406030204" pitchFamily="18" charset="0"/>
+                      </a:rPr>
+                      <m:t>𝑁</m:t>
+                    </m:r>
+                    <m:r>
+                      <a:rPr lang="en-US" sz="2400" b="0" i="1" smtClean="0">
+                        <a:latin typeface="Cambria Math" panose="02040503050406030204" pitchFamily="18" charset="0"/>
+                      </a:rPr>
+                      <m:t>∗</m:t>
+                    </m:r>
+                    <m:sSub>
+                      <m:sSubPr>
+                        <m:ctrlPr>
+                          <a:rPr lang="en-US" sz="2400" b="0" i="1" smtClean="0">
+                            <a:latin typeface="Cambria Math" panose="02040503050406030204" pitchFamily="18" charset="0"/>
+                          </a:rPr>
+                        </m:ctrlPr>
+                      </m:sSubPr>
+                      <m:e>
+                        <m:r>
+                          <a:rPr lang="en-US" sz="2400" b="0" i="1" smtClean="0">
+                            <a:latin typeface="Cambria Math" panose="02040503050406030204" pitchFamily="18" charset="0"/>
+                          </a:rPr>
+                          <m:t>𝑇</m:t>
+                        </m:r>
+                      </m:e>
+                      <m:sub>
+                        <m:r>
+                          <a:rPr lang="en-US" sz="2400" b="0" i="1" smtClean="0">
+                            <a:latin typeface="Cambria Math" panose="02040503050406030204" pitchFamily="18" charset="0"/>
+                          </a:rPr>
+                          <m:t>𝑝h𝑎𝑠𝑖𝑛𝑔</m:t>
+                        </m:r>
+                      </m:sub>
+                    </m:sSub>
+                    <m:r>
+                      <a:rPr lang="en-US" sz="2400" b="0" i="1" smtClean="0">
+                        <a:latin typeface="Cambria Math" panose="02040503050406030204" pitchFamily="18" charset="0"/>
+                      </a:rPr>
+                      <m:t>∗ </m:t>
+                    </m:r>
+                    <m:sSub>
+                      <m:sSubPr>
+                        <m:ctrlPr>
+                          <a:rPr lang="en-US" sz="2400" b="0" i="1" smtClean="0">
+                            <a:latin typeface="Cambria Math" panose="02040503050406030204" pitchFamily="18" charset="0"/>
+                          </a:rPr>
+                        </m:ctrlPr>
+                      </m:sSubPr>
+                      <m:e>
+                        <m:r>
+                          <a:rPr lang="en-US" sz="2400" b="0" i="1" smtClean="0">
+                            <a:latin typeface="Cambria Math" panose="02040503050406030204" pitchFamily="18" charset="0"/>
+                            <a:ea typeface="Cambria Math" panose="02040503050406030204" pitchFamily="18" charset="0"/>
+                          </a:rPr>
+                          <m:t>𝜔</m:t>
+                        </m:r>
+                      </m:e>
+                      <m:sub>
+                        <m:r>
+                          <a:rPr lang="en-US" sz="2400" b="0" i="1" smtClean="0">
+                            <a:latin typeface="Cambria Math" panose="02040503050406030204" pitchFamily="18" charset="0"/>
+                          </a:rPr>
+                          <m:t>𝐸𝑎𝑟𝑡h</m:t>
+                        </m:r>
+                      </m:sub>
+                    </m:sSub>
+                    <m:r>
+                      <a:rPr lang="en-US" sz="2400" b="0" i="1" smtClean="0">
+                        <a:latin typeface="Cambria Math" panose="02040503050406030204" pitchFamily="18" charset="0"/>
+                      </a:rPr>
+                      <m:t>=</m:t>
+                    </m:r>
+                    <m:r>
+                      <a:rPr lang="en-US" sz="2400" b="0" i="1" smtClean="0">
+                        <a:latin typeface="Cambria Math" panose="02040503050406030204" pitchFamily="18" charset="0"/>
+                      </a:rPr>
+                      <m:t>𝑁</m:t>
+                    </m:r>
+                    <m:r>
+                      <a:rPr lang="en-US" sz="2400" b="0" i="1" smtClean="0">
+                        <a:latin typeface="Cambria Math" panose="02040503050406030204" pitchFamily="18" charset="0"/>
+                      </a:rPr>
+                      <m:t>∗2</m:t>
+                    </m:r>
+                    <m:r>
+                      <a:rPr lang="en-US" sz="2400" b="0" i="1" smtClean="0">
+                        <a:latin typeface="Cambria Math" panose="02040503050406030204" pitchFamily="18" charset="0"/>
+                        <a:ea typeface="Cambria Math" panose="02040503050406030204" pitchFamily="18" charset="0"/>
+                      </a:rPr>
+                      <m:t>𝜋</m:t>
+                    </m:r>
+                    <m:r>
+                      <a:rPr lang="en-US" sz="2400" b="0" i="1" smtClean="0">
+                        <a:latin typeface="Cambria Math" panose="02040503050406030204" pitchFamily="18" charset="0"/>
+                        <a:ea typeface="Cambria Math" panose="02040503050406030204" pitchFamily="18" charset="0"/>
+                      </a:rPr>
+                      <m:t>− </m:t>
+                    </m:r>
+                    <m:d>
+                      <m:dPr>
+                        <m:ctrlPr>
+                          <a:rPr lang="en-US" sz="2400" b="0" i="1" smtClean="0">
+                            <a:latin typeface="Cambria Math" panose="02040503050406030204" pitchFamily="18" charset="0"/>
+                            <a:ea typeface="Cambria Math" panose="02040503050406030204" pitchFamily="18" charset="0"/>
+                          </a:rPr>
+                        </m:ctrlPr>
+                      </m:dPr>
+                      <m:e>
+                        <m:sSub>
+                          <m:sSubPr>
+                            <m:ctrlPr>
+                              <a:rPr lang="en-US" sz="2400" i="1">
+                                <a:latin typeface="Cambria Math" panose="02040503050406030204" pitchFamily="18" charset="0"/>
+                                <a:ea typeface="Cambria Math" panose="02040503050406030204" pitchFamily="18" charset="0"/>
+                              </a:rPr>
+                            </m:ctrlPr>
+                          </m:sSubPr>
+                          <m:e>
+                            <m:r>
+                              <a:rPr lang="en-US" sz="2400" i="1">
+                                <a:latin typeface="Cambria Math" panose="02040503050406030204" pitchFamily="18" charset="0"/>
+                                <a:ea typeface="Cambria Math" panose="02040503050406030204" pitchFamily="18" charset="0"/>
+                              </a:rPr>
+                              <m:t>∆</m:t>
+                            </m:r>
+                            <m:r>
+                              <a:rPr lang="en-US" sz="2400" i="1">
+                                <a:latin typeface="Cambria Math" panose="02040503050406030204" pitchFamily="18" charset="0"/>
+                                <a:ea typeface="Cambria Math" panose="02040503050406030204" pitchFamily="18" charset="0"/>
+                              </a:rPr>
+                              <m:t>𝜃</m:t>
+                            </m:r>
+                          </m:e>
+                          <m:sub>
+                            <m:r>
+                              <a:rPr lang="en-US" sz="2400" i="1">
+                                <a:latin typeface="Cambria Math" panose="02040503050406030204" pitchFamily="18" charset="0"/>
+                                <a:ea typeface="Cambria Math" panose="02040503050406030204" pitchFamily="18" charset="0"/>
+                              </a:rPr>
+                              <m:t>𝑖𝑛𝑖𝑡𝑖𝑎𝑙</m:t>
+                            </m:r>
+                          </m:sub>
+                        </m:sSub>
+                        <m:r>
+                          <a:rPr lang="en-US" sz="2400" b="0" i="1" smtClean="0">
+                            <a:latin typeface="Cambria Math" panose="02040503050406030204" pitchFamily="18" charset="0"/>
+                            <a:ea typeface="Cambria Math" panose="02040503050406030204" pitchFamily="18" charset="0"/>
+                          </a:rPr>
+                          <m:t>−</m:t>
+                        </m:r>
+                        <m:sSub>
+                          <m:sSubPr>
+                            <m:ctrlPr>
+                              <a:rPr lang="en-US" sz="2400" i="1">
+                                <a:latin typeface="Cambria Math" panose="02040503050406030204" pitchFamily="18" charset="0"/>
+                                <a:ea typeface="Cambria Math" panose="02040503050406030204" pitchFamily="18" charset="0"/>
+                              </a:rPr>
+                            </m:ctrlPr>
+                          </m:sSubPr>
+                          <m:e>
+                            <m:r>
+                              <a:rPr lang="en-US" sz="2400" i="1">
+                                <a:latin typeface="Cambria Math" panose="02040503050406030204" pitchFamily="18" charset="0"/>
+                                <a:ea typeface="Cambria Math" panose="02040503050406030204" pitchFamily="18" charset="0"/>
+                              </a:rPr>
+                              <m:t>∆</m:t>
+                            </m:r>
+                            <m:r>
+                              <a:rPr lang="en-US" sz="2400" i="1">
+                                <a:latin typeface="Cambria Math" panose="02040503050406030204" pitchFamily="18" charset="0"/>
+                                <a:ea typeface="Cambria Math" panose="02040503050406030204" pitchFamily="18" charset="0"/>
+                              </a:rPr>
+                              <m:t>𝜃</m:t>
+                            </m:r>
+                          </m:e>
+                          <m:sub>
+                            <m:r>
+                              <a:rPr lang="en-US" sz="2400" i="1">
+                                <a:latin typeface="Cambria Math" panose="02040503050406030204" pitchFamily="18" charset="0"/>
+                                <a:ea typeface="Cambria Math" panose="02040503050406030204" pitchFamily="18" charset="0"/>
+                              </a:rPr>
+                              <m:t>𝑓𝑖𝑛𝑎𝑙</m:t>
+                            </m:r>
+                          </m:sub>
+                        </m:sSub>
+                      </m:e>
+                    </m:d>
+                  </m:oMath>
+                </a14:m>
+                <a:endParaRPr lang="en-US" sz="2400" b="0" i="1" dirty="0">
+                  <a:latin typeface="Cambria Math" panose="02040503050406030204" pitchFamily="18" charset="0"/>
+                  <a:ea typeface="Cambria Math" panose="02040503050406030204" pitchFamily="18" charset="0"/>
+                </a:endParaRPr>
+              </a:p>
+              <a:p>
+                <a14:m>
+                  <m:oMath xmlns:m="http://schemas.openxmlformats.org/officeDocument/2006/math">
+                    <m:r>
+                      <a:rPr lang="en-US" sz="2400" i="1">
+                        <a:latin typeface="Cambria Math" panose="02040503050406030204" pitchFamily="18" charset="0"/>
+                        <a:ea typeface="Cambria Math" panose="02040503050406030204" pitchFamily="18" charset="0"/>
+                      </a:rPr>
+                      <m:t>→ </m:t>
+                    </m:r>
+                    <m:sSub>
+                      <m:sSubPr>
+                        <m:ctrlPr>
+                          <a:rPr lang="en-US" sz="2400" i="1">
+                            <a:latin typeface="Cambria Math" panose="02040503050406030204" pitchFamily="18" charset="0"/>
+                          </a:rPr>
+                        </m:ctrlPr>
+                      </m:sSubPr>
+                      <m:e>
+                        <m:r>
+                          <a:rPr lang="en-US" sz="2400" i="1">
+                            <a:latin typeface="Cambria Math" panose="02040503050406030204" pitchFamily="18" charset="0"/>
+                          </a:rPr>
+                          <m:t>𝑇</m:t>
+                        </m:r>
+                      </m:e>
+                      <m:sub>
+                        <m:r>
+                          <a:rPr lang="en-US" sz="2400" i="1">
+                            <a:latin typeface="Cambria Math" panose="02040503050406030204" pitchFamily="18" charset="0"/>
+                          </a:rPr>
+                          <m:t>𝑝h𝑎𝑠𝑖𝑛𝑔</m:t>
+                        </m:r>
+                      </m:sub>
+                    </m:sSub>
+                    <m:r>
+                      <a:rPr lang="en-US" sz="2400" b="0" i="1" smtClean="0">
+                        <a:latin typeface="Cambria Math" panose="02040503050406030204" pitchFamily="18" charset="0"/>
+                      </a:rPr>
+                      <m:t>=</m:t>
+                    </m:r>
+                    <m:f>
+                      <m:fPr>
+                        <m:ctrlPr>
+                          <a:rPr lang="en-US" sz="2400" b="0" i="1" smtClean="0">
+                            <a:latin typeface="Cambria Math" panose="02040503050406030204" pitchFamily="18" charset="0"/>
+                          </a:rPr>
+                        </m:ctrlPr>
+                      </m:fPr>
+                      <m:num>
+                        <m:d>
+                          <m:dPr>
+                            <m:ctrlPr>
+                              <a:rPr lang="en-US" sz="2400" b="0" i="1" smtClean="0">
+                                <a:latin typeface="Cambria Math" panose="02040503050406030204" pitchFamily="18" charset="0"/>
+                              </a:rPr>
+                            </m:ctrlPr>
+                          </m:dPr>
+                          <m:e>
+                            <m:r>
+                              <a:rPr lang="en-US" sz="2400" i="1">
+                                <a:latin typeface="Cambria Math" panose="02040503050406030204" pitchFamily="18" charset="0"/>
+                              </a:rPr>
+                              <m:t>2</m:t>
+                            </m:r>
+                            <m:r>
+                              <a:rPr lang="en-US" sz="2400" i="1">
+                                <a:latin typeface="Cambria Math" panose="02040503050406030204" pitchFamily="18" charset="0"/>
+                                <a:ea typeface="Cambria Math" panose="02040503050406030204" pitchFamily="18" charset="0"/>
+                              </a:rPr>
+                              <m:t>𝜋</m:t>
+                            </m:r>
+                            <m:r>
+                              <a:rPr lang="en-US" sz="2400" i="1">
+                                <a:latin typeface="Cambria Math" panose="02040503050406030204" pitchFamily="18" charset="0"/>
+                                <a:ea typeface="Cambria Math" panose="02040503050406030204" pitchFamily="18" charset="0"/>
+                              </a:rPr>
+                              <m:t>− </m:t>
+                            </m:r>
+                            <m:d>
+                              <m:dPr>
+                                <m:ctrlPr>
+                                  <a:rPr lang="en-US" sz="2400" i="1">
+                                    <a:latin typeface="Cambria Math" panose="02040503050406030204" pitchFamily="18" charset="0"/>
+                                    <a:ea typeface="Cambria Math" panose="02040503050406030204" pitchFamily="18" charset="0"/>
+                                  </a:rPr>
+                                </m:ctrlPr>
+                              </m:dPr>
+                              <m:e>
+                                <m:sSub>
+                                  <m:sSubPr>
+                                    <m:ctrlPr>
+                                      <a:rPr lang="en-US" sz="2400" i="1">
+                                        <a:latin typeface="Cambria Math" panose="02040503050406030204" pitchFamily="18" charset="0"/>
+                                        <a:ea typeface="Cambria Math" panose="02040503050406030204" pitchFamily="18" charset="0"/>
+                                      </a:rPr>
+                                    </m:ctrlPr>
+                                  </m:sSubPr>
+                                  <m:e>
+                                    <m:r>
+                                      <a:rPr lang="en-US" sz="2400" i="1">
+                                        <a:latin typeface="Cambria Math" panose="02040503050406030204" pitchFamily="18" charset="0"/>
+                                        <a:ea typeface="Cambria Math" panose="02040503050406030204" pitchFamily="18" charset="0"/>
+                                      </a:rPr>
+                                      <m:t>∆</m:t>
+                                    </m:r>
+                                    <m:r>
+                                      <a:rPr lang="en-US" sz="2400" i="1">
+                                        <a:latin typeface="Cambria Math" panose="02040503050406030204" pitchFamily="18" charset="0"/>
+                                        <a:ea typeface="Cambria Math" panose="02040503050406030204" pitchFamily="18" charset="0"/>
+                                      </a:rPr>
+                                      <m:t>𝜃</m:t>
+                                    </m:r>
+                                  </m:e>
+                                  <m:sub>
+                                    <m:r>
+                                      <a:rPr lang="en-US" sz="2400" i="1">
+                                        <a:latin typeface="Cambria Math" panose="02040503050406030204" pitchFamily="18" charset="0"/>
+                                        <a:ea typeface="Cambria Math" panose="02040503050406030204" pitchFamily="18" charset="0"/>
+                                      </a:rPr>
+                                      <m:t>𝑖𝑛𝑖𝑡𝑖𝑎𝑙</m:t>
+                                    </m:r>
+                                  </m:sub>
+                                </m:sSub>
+                                <m:r>
+                                  <a:rPr lang="en-US" sz="2400" i="1">
+                                    <a:latin typeface="Cambria Math" panose="02040503050406030204" pitchFamily="18" charset="0"/>
+                                    <a:ea typeface="Cambria Math" panose="02040503050406030204" pitchFamily="18" charset="0"/>
+                                  </a:rPr>
+                                  <m:t>−</m:t>
+                                </m:r>
+                                <m:sSub>
+                                  <m:sSubPr>
+                                    <m:ctrlPr>
+                                      <a:rPr lang="en-US" sz="2400" i="1">
+                                        <a:latin typeface="Cambria Math" panose="02040503050406030204" pitchFamily="18" charset="0"/>
+                                        <a:ea typeface="Cambria Math" panose="02040503050406030204" pitchFamily="18" charset="0"/>
+                                      </a:rPr>
+                                    </m:ctrlPr>
+                                  </m:sSubPr>
+                                  <m:e>
+                                    <m:r>
+                                      <a:rPr lang="en-US" sz="2400" i="1">
+                                        <a:latin typeface="Cambria Math" panose="02040503050406030204" pitchFamily="18" charset="0"/>
+                                        <a:ea typeface="Cambria Math" panose="02040503050406030204" pitchFamily="18" charset="0"/>
+                                      </a:rPr>
+                                      <m:t>∆</m:t>
+                                    </m:r>
+                                    <m:r>
+                                      <a:rPr lang="en-US" sz="2400" i="1">
+                                        <a:latin typeface="Cambria Math" panose="02040503050406030204" pitchFamily="18" charset="0"/>
+                                        <a:ea typeface="Cambria Math" panose="02040503050406030204" pitchFamily="18" charset="0"/>
+                                      </a:rPr>
+                                      <m:t>𝜃</m:t>
+                                    </m:r>
+                                  </m:e>
+                                  <m:sub>
+                                    <m:r>
+                                      <a:rPr lang="en-US" sz="2400" i="1">
+                                        <a:latin typeface="Cambria Math" panose="02040503050406030204" pitchFamily="18" charset="0"/>
+                                        <a:ea typeface="Cambria Math" panose="02040503050406030204" pitchFamily="18" charset="0"/>
+                                      </a:rPr>
+                                      <m:t>𝑓𝑖𝑛𝑎𝑙</m:t>
+                                    </m:r>
+                                  </m:sub>
+                                </m:sSub>
+                              </m:e>
+                            </m:d>
+                          </m:e>
+                        </m:d>
+                      </m:num>
+                      <m:den>
+                        <m:sSub>
+                          <m:sSubPr>
+                            <m:ctrlPr>
+                              <a:rPr lang="en-US" sz="2400" i="1">
+                                <a:latin typeface="Cambria Math" panose="02040503050406030204" pitchFamily="18" charset="0"/>
+                              </a:rPr>
+                            </m:ctrlPr>
+                          </m:sSubPr>
+                          <m:e>
+                            <m:r>
+                              <a:rPr lang="en-US" sz="2400" i="1">
+                                <a:latin typeface="Cambria Math" panose="02040503050406030204" pitchFamily="18" charset="0"/>
+                                <a:ea typeface="Cambria Math" panose="02040503050406030204" pitchFamily="18" charset="0"/>
+                              </a:rPr>
+                              <m:t>𝜔</m:t>
+                            </m:r>
+                          </m:e>
+                          <m:sub>
+                            <m:r>
+                              <a:rPr lang="en-US" sz="2400" i="1">
+                                <a:latin typeface="Cambria Math" panose="02040503050406030204" pitchFamily="18" charset="0"/>
+                              </a:rPr>
+                              <m:t>𝐸𝑎𝑟𝑡h</m:t>
+                            </m:r>
+                          </m:sub>
+                        </m:sSub>
+                      </m:den>
+                    </m:f>
+                  </m:oMath>
+                </a14:m>
+                <a:endParaRPr lang="en-US" sz="2400" dirty="0"/>
+              </a:p>
+              <a:p>
+                <a:pPr lvl="1"/>
+                <a:r>
+                  <a:rPr lang="en-US" sz="2000" dirty="0"/>
+                  <a:t>Ensures desired orbital position rotates around the Earth the same amount as the Chaser travels during one phasing orbit</a:t>
+                </a:r>
+              </a:p>
+              <a:p>
+                <a14:m>
+                  <m:oMath xmlns:m="http://schemas.openxmlformats.org/officeDocument/2006/math">
+                    <m:sSub>
+                      <m:sSubPr>
+                        <m:ctrlPr>
+                          <a:rPr lang="en-US" sz="2400" i="1">
+                            <a:latin typeface="Cambria Math" panose="02040503050406030204" pitchFamily="18" charset="0"/>
+                          </a:rPr>
+                        </m:ctrlPr>
+                      </m:sSubPr>
+                      <m:e>
+                        <m:r>
+                          <a:rPr lang="en-US" sz="2400" i="1">
+                            <a:latin typeface="Cambria Math" panose="02040503050406030204" pitchFamily="18" charset="0"/>
+                          </a:rPr>
+                          <m:t>𝑇</m:t>
+                        </m:r>
+                      </m:e>
+                      <m:sub>
+                        <m:r>
+                          <a:rPr lang="en-US" sz="2400" b="0" i="1" smtClean="0">
+                            <a:latin typeface="Cambria Math" panose="02040503050406030204" pitchFamily="18" charset="0"/>
+                          </a:rPr>
+                          <m:t>𝐺𝐸𝑂</m:t>
+                        </m:r>
+                      </m:sub>
+                    </m:sSub>
+                    <m:r>
+                      <a:rPr lang="en-US" sz="2400" b="0" i="1" smtClean="0">
+                        <a:latin typeface="Cambria Math" panose="02040503050406030204" pitchFamily="18" charset="0"/>
+                      </a:rPr>
+                      <m:t>=</m:t>
+                    </m:r>
+                    <m:f>
+                      <m:fPr>
+                        <m:ctrlPr>
+                          <a:rPr lang="en-US" sz="2400" b="0" i="1" smtClean="0">
+                            <a:latin typeface="Cambria Math" panose="02040503050406030204" pitchFamily="18" charset="0"/>
+                          </a:rPr>
+                        </m:ctrlPr>
+                      </m:fPr>
+                      <m:num>
+                        <m:r>
+                          <a:rPr lang="en-US" sz="2400" i="1">
+                            <a:latin typeface="Cambria Math" panose="02040503050406030204" pitchFamily="18" charset="0"/>
+                          </a:rPr>
+                          <m:t>2</m:t>
+                        </m:r>
+                        <m:r>
+                          <a:rPr lang="en-US" sz="2400" i="1">
+                            <a:latin typeface="Cambria Math" panose="02040503050406030204" pitchFamily="18" charset="0"/>
+                            <a:ea typeface="Cambria Math" panose="02040503050406030204" pitchFamily="18" charset="0"/>
+                          </a:rPr>
+                          <m:t>𝜋</m:t>
+                        </m:r>
+                      </m:num>
+                      <m:den>
+                        <m:sSub>
+                          <m:sSubPr>
+                            <m:ctrlPr>
+                              <a:rPr lang="en-US" sz="2400" i="1">
+                                <a:latin typeface="Cambria Math" panose="02040503050406030204" pitchFamily="18" charset="0"/>
+                              </a:rPr>
+                            </m:ctrlPr>
+                          </m:sSubPr>
+                          <m:e>
+                            <m:r>
+                              <a:rPr lang="en-US" sz="2400" i="1">
+                                <a:latin typeface="Cambria Math" panose="02040503050406030204" pitchFamily="18" charset="0"/>
+                                <a:ea typeface="Cambria Math" panose="02040503050406030204" pitchFamily="18" charset="0"/>
+                              </a:rPr>
+                              <m:t>𝜔</m:t>
+                            </m:r>
+                          </m:e>
+                          <m:sub>
+                            <m:r>
+                              <a:rPr lang="en-US" sz="2400" i="1">
+                                <a:latin typeface="Cambria Math" panose="02040503050406030204" pitchFamily="18" charset="0"/>
+                              </a:rPr>
+                              <m:t>𝐸𝑎𝑟𝑡h</m:t>
+                            </m:r>
+                          </m:sub>
+                        </m:sSub>
+                      </m:den>
+                    </m:f>
+                    <m:r>
+                      <a:rPr lang="en-US" sz="2400" b="0" i="1" smtClean="0">
+                        <a:latin typeface="Cambria Math" panose="02040503050406030204" pitchFamily="18" charset="0"/>
+                      </a:rPr>
+                      <m:t>=86164.0905 </m:t>
+                    </m:r>
+                    <m:r>
+                      <a:rPr lang="en-US" sz="2400" b="0" i="1" smtClean="0">
+                        <a:latin typeface="Cambria Math" panose="02040503050406030204" pitchFamily="18" charset="0"/>
+                      </a:rPr>
+                      <m:t>𝑠</m:t>
+                    </m:r>
+                  </m:oMath>
+                </a14:m>
+                <a:endParaRPr lang="en-US" sz="2400" dirty="0"/>
+              </a:p>
+              <a:p>
+                <a14:m>
+                  <m:oMath xmlns:m="http://schemas.openxmlformats.org/officeDocument/2006/math">
+                    <m:sSub>
+                      <m:sSubPr>
+                        <m:ctrlPr>
+                          <a:rPr lang="en-US" sz="2400" i="1" smtClean="0">
+                            <a:latin typeface="Cambria Math" panose="02040503050406030204" pitchFamily="18" charset="0"/>
+                          </a:rPr>
+                        </m:ctrlPr>
+                      </m:sSubPr>
+                      <m:e>
+                        <m:r>
+                          <a:rPr lang="en-US" sz="2400" b="0" i="1" smtClean="0">
+                            <a:latin typeface="Cambria Math" panose="02040503050406030204" pitchFamily="18" charset="0"/>
+                          </a:rPr>
+                          <m:t>𝑎</m:t>
+                        </m:r>
+                      </m:e>
+                      <m:sub>
+                        <m:r>
+                          <a:rPr lang="en-US" sz="2400" b="0" i="1" smtClean="0">
+                            <a:latin typeface="Cambria Math" panose="02040503050406030204" pitchFamily="18" charset="0"/>
+                          </a:rPr>
+                          <m:t>𝑝h𝑎𝑠𝑖𝑛𝑔</m:t>
+                        </m:r>
+                      </m:sub>
+                    </m:sSub>
+                    <m:r>
+                      <a:rPr lang="en-US" sz="2400" b="0" i="1" smtClean="0">
+                        <a:latin typeface="Cambria Math" panose="02040503050406030204" pitchFamily="18" charset="0"/>
+                      </a:rPr>
+                      <m:t>=</m:t>
+                    </m:r>
+                    <m:sSup>
+                      <m:sSupPr>
+                        <m:ctrlPr>
+                          <a:rPr lang="en-US" sz="2400" b="0" i="1" smtClean="0">
+                            <a:latin typeface="Cambria Math" panose="02040503050406030204" pitchFamily="18" charset="0"/>
+                          </a:rPr>
+                        </m:ctrlPr>
+                      </m:sSupPr>
+                      <m:e>
+                        <m:d>
+                          <m:dPr>
+                            <m:ctrlPr>
+                              <a:rPr lang="en-US" sz="2400" i="1">
+                                <a:latin typeface="Cambria Math" panose="02040503050406030204" pitchFamily="18" charset="0"/>
+                              </a:rPr>
+                            </m:ctrlPr>
+                          </m:dPr>
+                          <m:e>
+                            <m:f>
+                              <m:fPr>
+                                <m:ctrlPr>
+                                  <a:rPr lang="en-US" sz="2400" i="1">
+                                    <a:latin typeface="Cambria Math" panose="02040503050406030204" pitchFamily="18" charset="0"/>
+                                  </a:rPr>
+                                </m:ctrlPr>
+                              </m:fPr>
+                              <m:num>
+                                <m:sSub>
+                                  <m:sSubPr>
+                                    <m:ctrlPr>
+                                      <a:rPr lang="en-US" sz="2400" i="1">
+                                        <a:latin typeface="Cambria Math" panose="02040503050406030204" pitchFamily="18" charset="0"/>
+                                      </a:rPr>
+                                    </m:ctrlPr>
+                                  </m:sSubPr>
+                                  <m:e>
+                                    <m:r>
+                                      <a:rPr lang="en-US" sz="2400" i="1">
+                                        <a:latin typeface="Cambria Math" panose="02040503050406030204" pitchFamily="18" charset="0"/>
+                                      </a:rPr>
+                                      <m:t>𝑇</m:t>
+                                    </m:r>
+                                  </m:e>
+                                  <m:sub>
+                                    <m:r>
+                                      <a:rPr lang="en-US" sz="2400" i="1">
+                                        <a:latin typeface="Cambria Math" panose="02040503050406030204" pitchFamily="18" charset="0"/>
+                                      </a:rPr>
+                                      <m:t>𝑝h𝑎𝑠𝑖𝑛𝑔</m:t>
+                                    </m:r>
+                                  </m:sub>
+                                </m:sSub>
+                                <m:rad>
+                                  <m:radPr>
+                                    <m:degHide m:val="on"/>
+                                    <m:ctrlPr>
+                                      <a:rPr lang="en-US" sz="2400" i="1">
+                                        <a:latin typeface="Cambria Math" panose="02040503050406030204" pitchFamily="18" charset="0"/>
+                                      </a:rPr>
+                                    </m:ctrlPr>
+                                  </m:radPr>
+                                  <m:deg/>
+                                  <m:e>
+                                    <m:r>
+                                      <a:rPr lang="en-US" sz="2400" i="1">
+                                        <a:latin typeface="Cambria Math" panose="02040503050406030204" pitchFamily="18" charset="0"/>
+                                        <a:ea typeface="Cambria Math" panose="02040503050406030204" pitchFamily="18" charset="0"/>
+                                      </a:rPr>
+                                      <m:t>𝜇</m:t>
+                                    </m:r>
+                                  </m:e>
+                                </m:rad>
+                              </m:num>
+                              <m:den>
+                                <m:r>
+                                  <a:rPr lang="en-US" sz="2400" i="1">
+                                    <a:latin typeface="Cambria Math" panose="02040503050406030204" pitchFamily="18" charset="0"/>
+                                  </a:rPr>
+                                  <m:t>2</m:t>
+                                </m:r>
+                                <m:r>
+                                  <a:rPr lang="en-US" sz="2400" i="1">
+                                    <a:latin typeface="Cambria Math" panose="02040503050406030204" pitchFamily="18" charset="0"/>
+                                    <a:ea typeface="Cambria Math" panose="02040503050406030204" pitchFamily="18" charset="0"/>
+                                  </a:rPr>
+                                  <m:t>𝜋</m:t>
+                                </m:r>
+                              </m:den>
+                            </m:f>
+                          </m:e>
+                        </m:d>
+                      </m:e>
+                      <m:sup>
+                        <m:f>
+                          <m:fPr>
+                            <m:ctrlPr>
+                              <a:rPr lang="en-US" sz="2400" b="0" i="1" smtClean="0">
+                                <a:latin typeface="Cambria Math" panose="02040503050406030204" pitchFamily="18" charset="0"/>
+                              </a:rPr>
+                            </m:ctrlPr>
+                          </m:fPr>
+                          <m:num>
+                            <m:r>
+                              <a:rPr lang="en-US" sz="2400" b="0" i="1" smtClean="0">
+                                <a:latin typeface="Cambria Math" panose="02040503050406030204" pitchFamily="18" charset="0"/>
+                              </a:rPr>
+                              <m:t>2</m:t>
+                            </m:r>
+                          </m:num>
+                          <m:den>
+                            <m:r>
+                              <a:rPr lang="en-US" sz="2400" b="0" i="1" smtClean="0">
+                                <a:latin typeface="Cambria Math" panose="02040503050406030204" pitchFamily="18" charset="0"/>
+                              </a:rPr>
+                              <m:t>3</m:t>
+                            </m:r>
+                          </m:den>
+                        </m:f>
+                      </m:sup>
+                    </m:sSup>
+                  </m:oMath>
+                </a14:m>
+                <a:endParaRPr lang="en-US" sz="2400" dirty="0"/>
+              </a:p>
+            </p:txBody>
+          </p:sp>
+        </mc:Choice>
+        <mc:Fallback>
+          <p:sp>
+            <p:nvSpPr>
+              <p:cNvPr id="3" name="Content Placeholder 2">
+                <a:extLst>
+                  <a:ext uri="{FF2B5EF4-FFF2-40B4-BE49-F238E27FC236}">
+                    <a16:creationId xmlns:a16="http://schemas.microsoft.com/office/drawing/2014/main" id="{D0AA13CB-84B8-9C20-6639-7F4F4F45A63D}"/>
+                  </a:ext>
+                </a:extLst>
+              </p:cNvPr>
+              <p:cNvSpPr>
+                <a:spLocks noGrp="1" noRot="1" noChangeAspect="1" noMove="1" noResize="1" noEditPoints="1" noAdjustHandles="1" noChangeArrowheads="1" noChangeShapeType="1" noTextEdit="1"/>
+              </p:cNvSpPr>
+              <p:nvPr>
+                <p:ph sz="half" idx="1"/>
+              </p:nvPr>
+            </p:nvSpPr>
+            <p:spPr>
+              <a:blipFill>
+                <a:blip r:embed="rId2"/>
+                <a:stretch>
+                  <a:fillRect l="-1412" t="-1261" r="-1765"/>
+                </a:stretch>
+              </a:blipFill>
+            </p:spPr>
+            <p:txBody>
+              <a:bodyPr/>
+              <a:lstStyle/>
+              <a:p>
+                <a:r>
+                  <a:rPr lang="en-US">
+                    <a:noFill/>
+                  </a:rPr>
+                  <a:t> </a:t>
+                </a:r>
+              </a:p>
+            </p:txBody>
+          </p:sp>
+        </mc:Fallback>
+      </mc:AlternateContent>
+      <mc:AlternateContent xmlns:mc="http://schemas.openxmlformats.org/markup-compatibility/2006">
+        <mc:Choice xmlns:a14="http://schemas.microsoft.com/office/drawing/2010/main" Requires="a14">
+          <p:sp>
+            <p:nvSpPr>
+              <p:cNvPr id="4" name="Content Placeholder 3">
+                <a:extLst>
+                  <a:ext uri="{FF2B5EF4-FFF2-40B4-BE49-F238E27FC236}">
+                    <a16:creationId xmlns:a16="http://schemas.microsoft.com/office/drawing/2014/main" id="{1ECED39E-1A84-A037-8D35-1E0CB9041708}"/>
+                  </a:ext>
+                </a:extLst>
+              </p:cNvPr>
+              <p:cNvSpPr>
+                <a:spLocks noGrp="1"/>
+              </p:cNvSpPr>
+              <p:nvPr>
+                <p:ph sz="half" idx="2"/>
+              </p:nvPr>
+            </p:nvSpPr>
+            <p:spPr/>
+            <p:txBody>
+              <a:bodyPr>
+                <a:normAutofit fontScale="92500"/>
+              </a:bodyPr>
+              <a:lstStyle/>
+              <a:p>
+                <a:r>
+                  <a:rPr lang="en-US" sz="2200" dirty="0"/>
+                  <a:t>N = number of revolutions of phasing orbit (= 1 for this case)</a:t>
+                </a:r>
+              </a:p>
+              <a:p>
+                <a:r>
+                  <a:rPr lang="en-US" sz="2200" dirty="0" err="1"/>
+                  <a:t>T</a:t>
+                </a:r>
+                <a:r>
+                  <a:rPr lang="en-US" sz="2200" baseline="-25000" dirty="0" err="1"/>
+                  <a:t>phasing</a:t>
+                </a:r>
+                <a:r>
+                  <a:rPr lang="en-US" sz="2200" dirty="0"/>
+                  <a:t> = orbital period of phasing orbit</a:t>
+                </a:r>
+              </a:p>
+              <a:p>
+                <a14:m>
+                  <m:oMath xmlns:m="http://schemas.openxmlformats.org/officeDocument/2006/math">
+                    <m:sSub>
+                      <m:sSubPr>
+                        <m:ctrlPr>
+                          <a:rPr lang="en-US" sz="2200" i="1">
+                            <a:latin typeface="Cambria Math" panose="02040503050406030204" pitchFamily="18" charset="0"/>
+                          </a:rPr>
+                        </m:ctrlPr>
+                      </m:sSubPr>
+                      <m:e>
+                        <m:r>
+                          <a:rPr lang="en-US" sz="2200" i="1">
+                            <a:latin typeface="Cambria Math" panose="02040503050406030204" pitchFamily="18" charset="0"/>
+                            <a:ea typeface="Cambria Math" panose="02040503050406030204" pitchFamily="18" charset="0"/>
+                          </a:rPr>
+                          <m:t>𝜔</m:t>
+                        </m:r>
+                      </m:e>
+                      <m:sub>
+                        <m:r>
+                          <a:rPr lang="en-US" sz="2200" i="1">
+                            <a:latin typeface="Cambria Math" panose="02040503050406030204" pitchFamily="18" charset="0"/>
+                          </a:rPr>
+                          <m:t>𝐸𝑎𝑟𝑡h</m:t>
+                        </m:r>
+                      </m:sub>
+                    </m:sSub>
+                  </m:oMath>
+                </a14:m>
+                <a:r>
+                  <a:rPr lang="en-US" sz="2200" dirty="0"/>
+                  <a:t>= angular velocity of Earth, also equal to the mean motion of the satellites in circular geostationary orbit</a:t>
+                </a:r>
+              </a:p>
+              <a:p>
+                <a14:m>
+                  <m:oMath xmlns:m="http://schemas.openxmlformats.org/officeDocument/2006/math">
+                    <m:sSub>
+                      <m:sSubPr>
+                        <m:ctrlPr>
+                          <a:rPr lang="en-US" sz="2200" i="1">
+                            <a:latin typeface="Cambria Math" panose="02040503050406030204" pitchFamily="18" charset="0"/>
+                          </a:rPr>
+                        </m:ctrlPr>
+                      </m:sSubPr>
+                      <m:e>
+                        <m:r>
+                          <a:rPr lang="en-US" sz="2200" i="1">
+                            <a:latin typeface="Cambria Math" panose="02040503050406030204" pitchFamily="18" charset="0"/>
+                          </a:rPr>
+                          <m:t>𝑇</m:t>
+                        </m:r>
+                      </m:e>
+                      <m:sub>
+                        <m:r>
+                          <a:rPr lang="en-US" sz="2200" i="1">
+                            <a:latin typeface="Cambria Math" panose="02040503050406030204" pitchFamily="18" charset="0"/>
+                          </a:rPr>
+                          <m:t>𝐺𝐸𝑂</m:t>
+                        </m:r>
+                      </m:sub>
+                    </m:sSub>
+                  </m:oMath>
+                </a14:m>
+                <a:r>
+                  <a:rPr lang="en-US" sz="2200" dirty="0"/>
+                  <a:t>= orbital period in geostationary orbit, also equal to length of sidereal day</a:t>
+                </a:r>
+              </a:p>
+              <a:p>
+                <a14:m>
+                  <m:oMath xmlns:m="http://schemas.openxmlformats.org/officeDocument/2006/math">
+                    <m:sSub>
+                      <m:sSubPr>
+                        <m:ctrlPr>
+                          <a:rPr lang="en-US" sz="2200" i="1">
+                            <a:latin typeface="Cambria Math" panose="02040503050406030204" pitchFamily="18" charset="0"/>
+                          </a:rPr>
+                        </m:ctrlPr>
+                      </m:sSubPr>
+                      <m:e>
+                        <m:r>
+                          <a:rPr lang="en-US" sz="2200" i="1">
+                            <a:latin typeface="Cambria Math" panose="02040503050406030204" pitchFamily="18" charset="0"/>
+                          </a:rPr>
+                          <m:t>𝑎</m:t>
+                        </m:r>
+                      </m:e>
+                      <m:sub>
+                        <m:r>
+                          <a:rPr lang="en-US" sz="2200" i="1">
+                            <a:latin typeface="Cambria Math" panose="02040503050406030204" pitchFamily="18" charset="0"/>
+                          </a:rPr>
+                          <m:t>𝑝h𝑎𝑠𝑖𝑛𝑔</m:t>
+                        </m:r>
+                      </m:sub>
+                    </m:sSub>
+                  </m:oMath>
+                </a14:m>
+                <a:r>
+                  <a:rPr lang="en-US" sz="2200" dirty="0"/>
+                  <a:t>= semi-major axis of phasing orbit</a:t>
+                </a:r>
+              </a:p>
+              <a:p>
+                <a14:m>
+                  <m:oMath xmlns:m="http://schemas.openxmlformats.org/officeDocument/2006/math">
+                    <m:r>
+                      <a:rPr lang="en-US" sz="2000" i="1" smtClean="0">
+                        <a:latin typeface="Cambria Math" panose="02040503050406030204" pitchFamily="18" charset="0"/>
+                        <a:ea typeface="Cambria Math" panose="02040503050406030204" pitchFamily="18" charset="0"/>
+                      </a:rPr>
+                      <m:t>𝜇</m:t>
+                    </m:r>
+                  </m:oMath>
+                </a14:m>
+                <a:r>
+                  <a:rPr lang="en-US" sz="2200" dirty="0"/>
+                  <a:t>= gravity constant multiplied by Earth’s mass, equal to 398600.4415 km^3/s^2 per the EGM models</a:t>
+                </a:r>
+              </a:p>
+              <a:p>
+                <a:endParaRPr lang="en-US" dirty="0"/>
+              </a:p>
+              <a:p>
+                <a:endParaRPr lang="en-US" dirty="0"/>
+              </a:p>
+            </p:txBody>
+          </p:sp>
+        </mc:Choice>
+        <mc:Fallback>
+          <p:sp>
+            <p:nvSpPr>
+              <p:cNvPr id="4" name="Content Placeholder 3">
+                <a:extLst>
+                  <a:ext uri="{FF2B5EF4-FFF2-40B4-BE49-F238E27FC236}">
+                    <a16:creationId xmlns:a16="http://schemas.microsoft.com/office/drawing/2014/main" id="{1ECED39E-1A84-A037-8D35-1E0CB9041708}"/>
+                  </a:ext>
+                </a:extLst>
+              </p:cNvPr>
+              <p:cNvSpPr>
+                <a:spLocks noGrp="1" noRot="1" noChangeAspect="1" noMove="1" noResize="1" noEditPoints="1" noAdjustHandles="1" noChangeArrowheads="1" noChangeShapeType="1" noTextEdit="1"/>
+              </p:cNvSpPr>
+              <p:nvPr>
+                <p:ph sz="half" idx="2"/>
+              </p:nvPr>
+            </p:nvSpPr>
+            <p:spPr>
+              <a:blipFill>
+                <a:blip r:embed="rId3"/>
+                <a:stretch>
+                  <a:fillRect l="-1059" t="-1261"/>
+                </a:stretch>
+              </a:blipFill>
+            </p:spPr>
+            <p:txBody>
+              <a:bodyPr/>
+              <a:lstStyle/>
+              <a:p>
+                <a:r>
+                  <a:rPr lang="en-US">
+                    <a:noFill/>
+                  </a:rPr>
+                  <a:t> </a:t>
+                </a:r>
+              </a:p>
+            </p:txBody>
+          </p:sp>
+        </mc:Fallback>
+      </mc:AlternateContent>
+    </p:spTree>
+    <p:extLst>
+      <p:ext uri="{BB962C8B-B14F-4D97-AF65-F5344CB8AC3E}">
+        <p14:creationId xmlns:p14="http://schemas.microsoft.com/office/powerpoint/2010/main" val="1295038672"/>
+      </p:ext>
+    </p:extLst>
+  </p:cSld>
+  <p:clrMapOvr>
+    <a:masterClrMapping/>
+  </p:clrMapOvr>
+</p:sld>
+</file>
+
+<file path=ppt/slides/slide8.xml><?xml version="1.0" encoding="utf-8"?>
+<p:sld xmlns:a="http://schemas.openxmlformats.org/drawingml/2006/main" xmlns:r="http://schemas.openxmlformats.org/officeDocument/2006/relationships" xmlns:p="http://schemas.openxmlformats.org/presentationml/2006/main">
+  <p:cSld>
+    <p:spTree>
+      <p:nvGrpSpPr>
+        <p:cNvPr id="1" name=""/>
+        <p:cNvGrpSpPr/>
+        <p:nvPr/>
+      </p:nvGrpSpPr>
+      <p:grpSpPr>
+        <a:xfrm>
+          <a:off x="0" y="0"/>
+          <a:ext cx="0" cy="0"/>
+          <a:chOff x="0" y="0"/>
+          <a:chExt cx="0" cy="0"/>
+        </a:xfrm>
+      </p:grpSpPr>
+      <p:sp>
+        <p:nvSpPr>
+          <p:cNvPr id="2" name="Title 1">
+            <a:extLst>
+              <a:ext uri="{FF2B5EF4-FFF2-40B4-BE49-F238E27FC236}">
+                <a16:creationId xmlns:a16="http://schemas.microsoft.com/office/drawing/2014/main" id="{51A6EA39-6A26-DB44-F299-F13935A31D69}"/>
+              </a:ext>
+            </a:extLst>
+          </p:cNvPr>
+          <p:cNvSpPr>
+            <a:spLocks noGrp="1"/>
+          </p:cNvSpPr>
+          <p:nvPr>
+            <p:ph type="title"/>
+          </p:nvPr>
+        </p:nvSpPr>
+        <p:spPr/>
+        <p:txBody>
+          <a:bodyPr/>
+          <a:lstStyle/>
+          <a:p>
+            <a:r>
+              <a:rPr lang="en-US" dirty="0"/>
+              <a:t>How Do We Do?</a:t>
+            </a:r>
+          </a:p>
+        </p:txBody>
+      </p:sp>
+      <p:pic>
+        <p:nvPicPr>
+          <p:cNvPr id="6" name="Content Placeholder 5">
+            <a:extLst>
+              <a:ext uri="{FF2B5EF4-FFF2-40B4-BE49-F238E27FC236}">
+                <a16:creationId xmlns:a16="http://schemas.microsoft.com/office/drawing/2014/main" id="{E8F65258-E755-5DA9-9E1E-E2BA208CBCA7}"/>
+              </a:ext>
+            </a:extLst>
+          </p:cNvPr>
+          <p:cNvPicPr>
+            <a:picLocks noGrp="1" noChangeAspect="1"/>
+          </p:cNvPicPr>
+          <p:nvPr>
+            <p:ph sz="half" idx="1"/>
+          </p:nvPr>
+        </p:nvPicPr>
+        <p:blipFill>
+          <a:blip r:embed="rId2"/>
+          <a:stretch>
+            <a:fillRect/>
+          </a:stretch>
+        </p:blipFill>
+        <p:spPr>
+          <a:xfrm>
+            <a:off x="838200" y="2820267"/>
+            <a:ext cx="5181600" cy="2362053"/>
+          </a:xfrm>
+          <a:prstGeom prst="rect">
+            <a:avLst/>
+          </a:prstGeom>
+        </p:spPr>
+      </p:pic>
+      <p:pic>
+        <p:nvPicPr>
+          <p:cNvPr id="17" name="Content Placeholder 16">
+            <a:extLst>
+              <a:ext uri="{FF2B5EF4-FFF2-40B4-BE49-F238E27FC236}">
+                <a16:creationId xmlns:a16="http://schemas.microsoft.com/office/drawing/2014/main" id="{3B30C15C-DF54-C226-AA0D-116610711D70}"/>
+              </a:ext>
+            </a:extLst>
+          </p:cNvPr>
+          <p:cNvPicPr>
+            <a:picLocks noGrp="1" noChangeAspect="1"/>
+          </p:cNvPicPr>
+          <p:nvPr>
+            <p:ph sz="half" idx="2"/>
+          </p:nvPr>
+        </p:nvPicPr>
+        <p:blipFill>
+          <a:blip r:embed="rId3"/>
+          <a:srcRect r="49938"/>
+          <a:stretch>
+            <a:fillRect/>
+          </a:stretch>
+        </p:blipFill>
+        <p:spPr>
+          <a:xfrm>
+            <a:off x="6172202" y="3065142"/>
+            <a:ext cx="5551866" cy="929430"/>
+          </a:xfrm>
+          <a:prstGeom prst="rect">
+            <a:avLst/>
+          </a:prstGeom>
+        </p:spPr>
+      </p:pic>
+      <p:cxnSp>
+        <p:nvCxnSpPr>
+          <p:cNvPr id="8" name="Straight Arrow Connector 7">
+            <a:extLst>
+              <a:ext uri="{FF2B5EF4-FFF2-40B4-BE49-F238E27FC236}">
+                <a16:creationId xmlns:a16="http://schemas.microsoft.com/office/drawing/2014/main" id="{C9235A01-DD67-FFAF-0DC6-DC9AC5F2B06C}"/>
+              </a:ext>
+            </a:extLst>
+          </p:cNvPr>
+          <p:cNvCxnSpPr>
+            <a:cxnSpLocks/>
+          </p:cNvCxnSpPr>
+          <p:nvPr/>
+        </p:nvCxnSpPr>
+        <p:spPr>
+          <a:xfrm>
+            <a:off x="2160494" y="5289176"/>
+            <a:ext cx="0" cy="536368"/>
+          </a:xfrm>
+          <a:prstGeom prst="straightConnector1">
+            <a:avLst/>
+          </a:prstGeom>
+          <a:ln>
+            <a:tailEnd type="triangle"/>
+          </a:ln>
+        </p:spPr>
+        <p:style>
+          <a:lnRef idx="2">
+            <a:schemeClr val="accent1"/>
+          </a:lnRef>
+          <a:fillRef idx="0">
+            <a:schemeClr val="accent1"/>
+          </a:fillRef>
+          <a:effectRef idx="1">
+            <a:schemeClr val="accent1"/>
+          </a:effectRef>
+          <a:fontRef idx="minor">
+            <a:schemeClr val="tx1"/>
+          </a:fontRef>
+        </p:style>
+      </p:cxnSp>
+      <p:cxnSp>
+        <p:nvCxnSpPr>
+          <p:cNvPr id="10" name="Straight Arrow Connector 9">
+            <a:extLst>
+              <a:ext uri="{FF2B5EF4-FFF2-40B4-BE49-F238E27FC236}">
+                <a16:creationId xmlns:a16="http://schemas.microsoft.com/office/drawing/2014/main" id="{82D34B8B-4FBA-E5D0-26F9-9BB31BC5641B}"/>
+              </a:ext>
+            </a:extLst>
+          </p:cNvPr>
+          <p:cNvCxnSpPr/>
+          <p:nvPr/>
+        </p:nvCxnSpPr>
+        <p:spPr>
+          <a:xfrm flipH="1">
+            <a:off x="188890" y="3773510"/>
+            <a:ext cx="437882" cy="0"/>
+          </a:xfrm>
+          <a:prstGeom prst="straightConnector1">
+            <a:avLst/>
+          </a:prstGeom>
+          <a:ln>
+            <a:tailEnd type="triangle"/>
+          </a:ln>
+        </p:spPr>
+        <p:style>
+          <a:lnRef idx="2">
+            <a:schemeClr val="accent6"/>
+          </a:lnRef>
+          <a:fillRef idx="0">
+            <a:schemeClr val="accent6"/>
+          </a:fillRef>
+          <a:effectRef idx="1">
+            <a:schemeClr val="accent6"/>
+          </a:effectRef>
+          <a:fontRef idx="minor">
+            <a:schemeClr val="tx1"/>
+          </a:fontRef>
+        </p:style>
+      </p:cxnSp>
+      <p:sp>
+        <p:nvSpPr>
+          <p:cNvPr id="11" name="TextBox 10">
+            <a:extLst>
+              <a:ext uri="{FF2B5EF4-FFF2-40B4-BE49-F238E27FC236}">
+                <a16:creationId xmlns:a16="http://schemas.microsoft.com/office/drawing/2014/main" id="{663C38CC-DDB7-79FD-A5C8-456A76621B23}"/>
+              </a:ext>
+            </a:extLst>
+          </p:cNvPr>
+          <p:cNvSpPr txBox="1"/>
+          <p:nvPr/>
+        </p:nvSpPr>
+        <p:spPr>
+          <a:xfrm>
+            <a:off x="98738" y="3308376"/>
+            <a:ext cx="777025" cy="369332"/>
+          </a:xfrm>
+          <a:prstGeom prst="rect">
+            <a:avLst/>
+          </a:prstGeom>
+          <a:noFill/>
+        </p:spPr>
+        <p:txBody>
+          <a:bodyPr wrap="square" rtlCol="0">
+            <a:spAutoFit/>
+          </a:bodyPr>
+          <a:lstStyle/>
+          <a:p>
+            <a:r>
+              <a:rPr lang="en-US" dirty="0"/>
+              <a:t>V</a:t>
+            </a:r>
+            <a:r>
+              <a:rPr lang="en-US" baseline="-25000" dirty="0"/>
+              <a:t>target</a:t>
+            </a:r>
+            <a:endParaRPr lang="en-US" dirty="0"/>
+          </a:p>
+        </p:txBody>
+      </p:sp>
+      <p:sp>
+        <p:nvSpPr>
+          <p:cNvPr id="14" name="TextBox 13">
+            <a:extLst>
+              <a:ext uri="{FF2B5EF4-FFF2-40B4-BE49-F238E27FC236}">
+                <a16:creationId xmlns:a16="http://schemas.microsoft.com/office/drawing/2014/main" id="{5FC2BC50-EFBD-122D-1B6A-DBFFD3A42EC0}"/>
+              </a:ext>
+            </a:extLst>
+          </p:cNvPr>
+          <p:cNvSpPr txBox="1"/>
+          <p:nvPr/>
+        </p:nvSpPr>
+        <p:spPr>
+          <a:xfrm>
+            <a:off x="2216271" y="5322596"/>
+            <a:ext cx="827436" cy="369332"/>
+          </a:xfrm>
+          <a:prstGeom prst="rect">
+            <a:avLst/>
+          </a:prstGeom>
+          <a:noFill/>
+        </p:spPr>
+        <p:txBody>
+          <a:bodyPr wrap="square" rtlCol="0">
+            <a:spAutoFit/>
+          </a:bodyPr>
+          <a:lstStyle/>
+          <a:p>
+            <a:r>
+              <a:rPr lang="en-US" dirty="0"/>
+              <a:t>Nadir</a:t>
+            </a:r>
+          </a:p>
+        </p:txBody>
+      </p:sp>
+      <p:pic>
+        <p:nvPicPr>
+          <p:cNvPr id="18" name="Content Placeholder 16">
+            <a:extLst>
+              <a:ext uri="{FF2B5EF4-FFF2-40B4-BE49-F238E27FC236}">
+                <a16:creationId xmlns:a16="http://schemas.microsoft.com/office/drawing/2014/main" id="{A7E988ED-86BB-FDDB-A8D9-401F28A251BC}"/>
+              </a:ext>
+            </a:extLst>
+          </p:cNvPr>
+          <p:cNvPicPr>
+            <a:picLocks noChangeAspect="1"/>
+          </p:cNvPicPr>
+          <p:nvPr/>
+        </p:nvPicPr>
+        <p:blipFill>
+          <a:blip r:embed="rId3"/>
+          <a:srcRect l="50062"/>
+          <a:stretch>
+            <a:fillRect/>
+          </a:stretch>
+        </p:blipFill>
+        <p:spPr>
+          <a:xfrm>
+            <a:off x="6172202" y="4001293"/>
+            <a:ext cx="5538083" cy="929430"/>
+          </a:xfrm>
+          <a:prstGeom prst="rect">
+            <a:avLst/>
+          </a:prstGeom>
+        </p:spPr>
+      </p:pic>
+      <p:cxnSp>
+        <p:nvCxnSpPr>
+          <p:cNvPr id="20" name="Straight Arrow Connector 19">
+            <a:extLst>
+              <a:ext uri="{FF2B5EF4-FFF2-40B4-BE49-F238E27FC236}">
+                <a16:creationId xmlns:a16="http://schemas.microsoft.com/office/drawing/2014/main" id="{78EEAC61-6C8F-77A4-D953-A9560D3AD57B}"/>
+              </a:ext>
+            </a:extLst>
+          </p:cNvPr>
+          <p:cNvCxnSpPr>
+            <a:cxnSpLocks/>
+          </p:cNvCxnSpPr>
+          <p:nvPr/>
+        </p:nvCxnSpPr>
+        <p:spPr>
+          <a:xfrm flipH="1">
+            <a:off x="8847786" y="2786130"/>
+            <a:ext cx="218941" cy="1056067"/>
+          </a:xfrm>
+          <a:prstGeom prst="straightConnector1">
+            <a:avLst/>
+          </a:prstGeom>
+          <a:ln>
+            <a:tailEnd type="triangle"/>
+          </a:ln>
+        </p:spPr>
+        <p:style>
+          <a:lnRef idx="2">
+            <a:schemeClr val="accent1"/>
+          </a:lnRef>
+          <a:fillRef idx="0">
+            <a:schemeClr val="accent1"/>
+          </a:fillRef>
+          <a:effectRef idx="1">
+            <a:schemeClr val="accent1"/>
+          </a:effectRef>
+          <a:fontRef idx="minor">
+            <a:schemeClr val="tx1"/>
+          </a:fontRef>
+        </p:style>
+      </p:cxnSp>
+      <p:sp>
+        <p:nvSpPr>
+          <p:cNvPr id="22" name="TextBox 21">
+            <a:extLst>
+              <a:ext uri="{FF2B5EF4-FFF2-40B4-BE49-F238E27FC236}">
+                <a16:creationId xmlns:a16="http://schemas.microsoft.com/office/drawing/2014/main" id="{25BBAA3C-8FCE-E1C8-AEDE-D7592C6C9FE7}"/>
+              </a:ext>
+            </a:extLst>
+          </p:cNvPr>
+          <p:cNvSpPr txBox="1"/>
+          <p:nvPr/>
+        </p:nvSpPr>
+        <p:spPr>
+          <a:xfrm>
+            <a:off x="8568348" y="2139799"/>
+            <a:ext cx="1166500" cy="646331"/>
+          </a:xfrm>
+          <a:prstGeom prst="rect">
+            <a:avLst/>
+          </a:prstGeom>
+          <a:noFill/>
+        </p:spPr>
+        <p:txBody>
+          <a:bodyPr wrap="square" rtlCol="0">
+            <a:spAutoFit/>
+          </a:bodyPr>
+          <a:lstStyle/>
+          <a:p>
+            <a:r>
+              <a:rPr lang="en-US" dirty="0"/>
+              <a:t>Start at 100 km</a:t>
+            </a:r>
+          </a:p>
+        </p:txBody>
+      </p:sp>
+      <p:sp>
+        <p:nvSpPr>
+          <p:cNvPr id="23" name="TextBox 22">
+            <a:extLst>
+              <a:ext uri="{FF2B5EF4-FFF2-40B4-BE49-F238E27FC236}">
+                <a16:creationId xmlns:a16="http://schemas.microsoft.com/office/drawing/2014/main" id="{B9219BDE-B7EC-D4E1-F86A-6A6A741EA111}"/>
+              </a:ext>
+            </a:extLst>
+          </p:cNvPr>
+          <p:cNvSpPr txBox="1"/>
+          <p:nvPr/>
+        </p:nvSpPr>
+        <p:spPr>
+          <a:xfrm>
+            <a:off x="10304850" y="2360871"/>
+            <a:ext cx="1166500" cy="646331"/>
+          </a:xfrm>
+          <a:prstGeom prst="rect">
+            <a:avLst/>
+          </a:prstGeom>
+          <a:noFill/>
+        </p:spPr>
+        <p:txBody>
+          <a:bodyPr wrap="square" rtlCol="0">
+            <a:spAutoFit/>
+          </a:bodyPr>
+          <a:lstStyle/>
+          <a:p>
+            <a:r>
+              <a:rPr lang="en-US" dirty="0"/>
+              <a:t>End at ~10 km</a:t>
+            </a:r>
+          </a:p>
+        </p:txBody>
+      </p:sp>
+      <p:cxnSp>
+        <p:nvCxnSpPr>
+          <p:cNvPr id="24" name="Straight Arrow Connector 23">
+            <a:extLst>
+              <a:ext uri="{FF2B5EF4-FFF2-40B4-BE49-F238E27FC236}">
+                <a16:creationId xmlns:a16="http://schemas.microsoft.com/office/drawing/2014/main" id="{677CF14F-A0FE-1589-74C9-28CEE65E0F6E}"/>
+              </a:ext>
+            </a:extLst>
+          </p:cNvPr>
+          <p:cNvCxnSpPr>
+            <a:cxnSpLocks/>
+          </p:cNvCxnSpPr>
+          <p:nvPr/>
+        </p:nvCxnSpPr>
+        <p:spPr>
+          <a:xfrm flipH="1">
+            <a:off x="10230118" y="2900966"/>
+            <a:ext cx="538767" cy="941231"/>
+          </a:xfrm>
+          <a:prstGeom prst="straightConnector1">
+            <a:avLst/>
+          </a:prstGeom>
+          <a:ln>
+            <a:tailEnd type="triangle"/>
+          </a:ln>
+        </p:spPr>
+        <p:style>
+          <a:lnRef idx="2">
+            <a:schemeClr val="accent1"/>
+          </a:lnRef>
+          <a:fillRef idx="0">
+            <a:schemeClr val="accent1"/>
+          </a:fillRef>
+          <a:effectRef idx="1">
+            <a:schemeClr val="accent1"/>
+          </a:effectRef>
+          <a:fontRef idx="minor">
+            <a:schemeClr val="tx1"/>
+          </a:fontRef>
+        </p:style>
+      </p:cxnSp>
+      <p:sp>
+        <p:nvSpPr>
+          <p:cNvPr id="26" name="TextBox 25">
+            <a:extLst>
+              <a:ext uri="{FF2B5EF4-FFF2-40B4-BE49-F238E27FC236}">
+                <a16:creationId xmlns:a16="http://schemas.microsoft.com/office/drawing/2014/main" id="{2BB261F6-017C-840F-C78E-F51CD351E3D5}"/>
+              </a:ext>
+            </a:extLst>
+          </p:cNvPr>
+          <p:cNvSpPr txBox="1"/>
+          <p:nvPr/>
+        </p:nvSpPr>
+        <p:spPr>
+          <a:xfrm>
+            <a:off x="9975729" y="5453135"/>
+            <a:ext cx="1703378" cy="646331"/>
+          </a:xfrm>
+          <a:prstGeom prst="rect">
+            <a:avLst/>
+          </a:prstGeom>
+          <a:noFill/>
+        </p:spPr>
+        <p:txBody>
+          <a:bodyPr wrap="square" rtlCol="0">
+            <a:spAutoFit/>
+          </a:bodyPr>
+          <a:lstStyle/>
+          <a:p>
+            <a:r>
+              <a:rPr lang="en-US" dirty="0"/>
+              <a:t>Total of 0.73 m/s of delta-V</a:t>
+            </a:r>
+          </a:p>
+        </p:txBody>
+      </p:sp>
+      <p:cxnSp>
+        <p:nvCxnSpPr>
+          <p:cNvPr id="27" name="Straight Arrow Connector 26">
+            <a:extLst>
+              <a:ext uri="{FF2B5EF4-FFF2-40B4-BE49-F238E27FC236}">
+                <a16:creationId xmlns:a16="http://schemas.microsoft.com/office/drawing/2014/main" id="{EAF86F1A-4939-A097-2F49-06628E59D059}"/>
+              </a:ext>
+            </a:extLst>
+          </p:cNvPr>
+          <p:cNvCxnSpPr>
+            <a:cxnSpLocks/>
+            <a:stCxn id="26" idx="0"/>
+          </p:cNvCxnSpPr>
+          <p:nvPr/>
+        </p:nvCxnSpPr>
+        <p:spPr>
+          <a:xfrm flipH="1" flipV="1">
+            <a:off x="10569262" y="4930723"/>
+            <a:ext cx="258156" cy="522412"/>
+          </a:xfrm>
+          <a:prstGeom prst="straightConnector1">
+            <a:avLst/>
+          </a:prstGeom>
+          <a:ln>
+            <a:tailEnd type="triangle"/>
+          </a:ln>
+        </p:spPr>
+        <p:style>
+          <a:lnRef idx="2">
+            <a:schemeClr val="accent1"/>
+          </a:lnRef>
+          <a:fillRef idx="0">
+            <a:schemeClr val="accent1"/>
+          </a:fillRef>
+          <a:effectRef idx="1">
+            <a:schemeClr val="accent1"/>
+          </a:effectRef>
+          <a:fontRef idx="minor">
+            <a:schemeClr val="tx1"/>
+          </a:fontRef>
+        </p:style>
+      </p:cxnSp>
+      <p:pic>
+        <p:nvPicPr>
+          <p:cNvPr id="31" name="Picture 30">
+            <a:extLst>
+              <a:ext uri="{FF2B5EF4-FFF2-40B4-BE49-F238E27FC236}">
+                <a16:creationId xmlns:a16="http://schemas.microsoft.com/office/drawing/2014/main" id="{D01F798A-E5EB-69EF-A60B-B22855B8D060}"/>
+              </a:ext>
+            </a:extLst>
+          </p:cNvPr>
+          <p:cNvPicPr>
+            <a:picLocks noChangeAspect="1"/>
+          </p:cNvPicPr>
+          <p:nvPr/>
+        </p:nvPicPr>
+        <p:blipFill>
+          <a:blip r:embed="rId4"/>
+          <a:stretch>
+            <a:fillRect/>
+          </a:stretch>
+        </p:blipFill>
+        <p:spPr>
+          <a:xfrm>
+            <a:off x="838200" y="1517866"/>
+            <a:ext cx="4640052" cy="1302401"/>
+          </a:xfrm>
+          <a:prstGeom prst="rect">
+            <a:avLst/>
+          </a:prstGeom>
+        </p:spPr>
+      </p:pic>
+    </p:spTree>
+    <p:extLst>
+      <p:ext uri="{BB962C8B-B14F-4D97-AF65-F5344CB8AC3E}">
+        <p14:creationId xmlns:p14="http://schemas.microsoft.com/office/powerpoint/2010/main" val="3883069851"/>
+      </p:ext>
+    </p:extLst>
+  </p:cSld>
+  <p:clrMapOvr>
+    <a:masterClrMapping/>
+  </p:clrMapOvr>
+</p:sld>
+</file>
+
+<file path=ppt/slides/slide9.xml><?xml version="1.0" encoding="utf-8"?>
+<p:sld xmlns:a="http://schemas.openxmlformats.org/drawingml/2006/main" xmlns:r="http://schemas.openxmlformats.org/officeDocument/2006/relationships" xmlns:p="http://schemas.openxmlformats.org/presentationml/2006/main">
+  <p:cSld>
+    <p:spTree>
+      <p:nvGrpSpPr>
+        <p:cNvPr id="1" name=""/>
+        <p:cNvGrpSpPr/>
+        <p:nvPr/>
+      </p:nvGrpSpPr>
+      <p:grpSpPr>
+        <a:xfrm>
+          <a:off x="0" y="0"/>
+          <a:ext cx="0" cy="0"/>
+          <a:chOff x="0" y="0"/>
+          <a:chExt cx="0" cy="0"/>
+        </a:xfrm>
+      </p:grpSpPr>
+      <p:sp>
+        <p:nvSpPr>
+          <p:cNvPr id="2" name="Title 1">
+            <a:extLst>
+              <a:ext uri="{FF2B5EF4-FFF2-40B4-BE49-F238E27FC236}">
+                <a16:creationId xmlns:a16="http://schemas.microsoft.com/office/drawing/2014/main" id="{3DFD89EA-09CA-E08C-B4DC-8C4077BC6773}"/>
+              </a:ext>
+            </a:extLst>
+          </p:cNvPr>
+          <p:cNvSpPr>
+            <a:spLocks noGrp="1"/>
+          </p:cNvSpPr>
+          <p:nvPr>
+            <p:ph type="title"/>
+          </p:nvPr>
+        </p:nvSpPr>
+        <p:spPr/>
+        <p:txBody>
+          <a:bodyPr/>
+          <a:lstStyle/>
+          <a:p>
+            <a:r>
+              <a:rPr lang="en-US" dirty="0"/>
+              <a:t>Next Steps Necessary To </a:t>
+            </a:r>
+            <a:r>
+              <a:rPr lang="en-US"/>
+              <a:t>Improve Fidelity</a:t>
+            </a:r>
+            <a:endParaRPr lang="en-US" dirty="0"/>
+          </a:p>
+        </p:txBody>
+      </p:sp>
+      <p:sp>
+        <p:nvSpPr>
+          <p:cNvPr id="5" name="Content Placeholder 4">
+            <a:extLst>
+              <a:ext uri="{FF2B5EF4-FFF2-40B4-BE49-F238E27FC236}">
+                <a16:creationId xmlns:a16="http://schemas.microsoft.com/office/drawing/2014/main" id="{A87CB458-A3C3-4FEA-F20A-9DD9902D62CB}"/>
+              </a:ext>
+            </a:extLst>
+          </p:cNvPr>
+          <p:cNvSpPr>
+            <a:spLocks noGrp="1"/>
+          </p:cNvSpPr>
+          <p:nvPr>
+            <p:ph idx="1"/>
+          </p:nvPr>
+        </p:nvSpPr>
+        <p:spPr/>
+        <p:txBody>
+          <a:bodyPr>
+            <a:normAutofit/>
+          </a:bodyPr>
+          <a:lstStyle/>
+          <a:p>
+            <a:r>
+              <a:rPr lang="en-US" dirty="0"/>
+              <a:t>Model propulsion system performance using finite burns instead of impulsive maneuvers</a:t>
+            </a:r>
+          </a:p>
+          <a:p>
+            <a:r>
+              <a:rPr lang="en-US" dirty="0"/>
+              <a:t>Ensure propulsion system thrust and specific impulse are modeled according to empirical data</a:t>
+            </a:r>
+          </a:p>
+          <a:p>
+            <a:r>
+              <a:rPr lang="en-US" dirty="0"/>
+              <a:t>Verify additional constraints that may be applicable for CONOPS (power system performance in and out of eclipse, attitude constraints / pointing performance, time required for TTC ground links / crosslinks / etc.)</a:t>
+            </a:r>
+          </a:p>
+          <a:p>
+            <a:r>
+              <a:rPr lang="en-US" dirty="0"/>
+              <a:t>Verify other CONOPS-related use cases / scenarios, e.g. maneuver aborts, hardware failures, flight / ground anomalies</a:t>
+            </a:r>
+          </a:p>
+        </p:txBody>
+      </p:sp>
+    </p:spTree>
+    <p:extLst>
+      <p:ext uri="{BB962C8B-B14F-4D97-AF65-F5344CB8AC3E}">
+        <p14:creationId xmlns:p14="http://schemas.microsoft.com/office/powerpoint/2010/main" val="3238733356"/>
       </p:ext>
     </p:extLst>
   </p:cSld>
